--- a/Project/Paper/SOLO_LLM_Assessment_Presentation.pptx
+++ b/Project/Paper/SOLO_LLM_Assessment_Presentation.pptx
@@ -2200,7 +2200,7 @@
               <a:buNone/>
             </a:pPr>
             <a:r>
-              <a:rPr lang="en-US" sz="1600" b="1" dirty="0">
+              <a:rPr lang="en-US" sz="1800" b="1" dirty="0">
                 <a:solidFill>
                   <a:srgbClr val="0A2540"/>
                 </a:solidFill>
@@ -2210,7 +2210,7 @@
               </a:rPr>
               <a:t>Research questions</a:t>
             </a:r>
-            <a:endParaRPr lang="en-US" sz="1600" dirty="0"/>
+            <a:endParaRPr lang="en-US" sz="1800" dirty="0"/>
           </a:p>
         </p:txBody>
       </p:sp>
@@ -2337,7 +2337,7 @@
               <a:buNone/>
             </a:pPr>
             <a:r>
-              <a:rPr lang="en-US" sz="1200" dirty="0">
+              <a:rPr lang="en-US" sz="1500" dirty="0">
                 <a:solidFill>
                   <a:srgbClr val="0F172A"/>
                 </a:solidFill>
@@ -2347,7 +2347,7 @@
               </a:rPr>
               <a:t>Do the automatically generated assessment items align with their assigned SOLO level?</a:t>
             </a:r>
-            <a:endParaRPr lang="en-US" sz="1200" dirty="0"/>
+            <a:endParaRPr lang="en-US" sz="1500" dirty="0"/>
           </a:p>
         </p:txBody>
       </p:sp>
@@ -2474,7 +2474,7 @@
               <a:buNone/>
             </a:pPr>
             <a:r>
-              <a:rPr lang="en-US" sz="1200" dirty="0">
+              <a:rPr lang="en-US" sz="1500" dirty="0">
                 <a:solidFill>
                   <a:srgbClr val="0F172A"/>
                 </a:solidFill>
@@ -2484,7 +2484,7 @@
               </a:rPr>
               <a:t>Are the automatically generated distractors plausible?</a:t>
             </a:r>
-            <a:endParaRPr lang="en-US" sz="1200" dirty="0"/>
+            <a:endParaRPr lang="en-US" sz="1500" dirty="0"/>
           </a:p>
         </p:txBody>
       </p:sp>
@@ -2513,7 +2513,7 @@
               <a:buNone/>
             </a:pPr>
             <a:r>
-              <a:rPr lang="en-US" sz="1600" b="1" dirty="0">
+              <a:rPr lang="en-US" sz="1800" b="1" dirty="0">
                 <a:solidFill>
                   <a:srgbClr val="0A2540"/>
                 </a:solidFill>
@@ -2523,7 +2523,7 @@
               </a:rPr>
               <a:t>Study setup</a:t>
             </a:r>
-            <a:endParaRPr lang="en-US" sz="1600" dirty="0"/>
+            <a:endParaRPr lang="en-US" sz="1800" dirty="0"/>
           </a:p>
         </p:txBody>
       </p:sp>
@@ -2589,7 +2589,7 @@
               </a:rPr>
               <a:t>METHOD</a:t>
             </a:r>
-            <a:endParaRPr lang="en-US" sz="1000" dirty="0"/>
+            <a:endParaRPr lang="en-US" sz="1200" dirty="0"/>
           </a:p>
         </p:txBody>
       </p:sp>
@@ -2618,7 +2618,7 @@
               <a:buNone/>
             </a:pPr>
             <a:r>
-              <a:rPr lang="en-US" sz="1200" b="1" dirty="0">
+              <a:rPr lang="en-US" sz="1500" b="1" dirty="0">
                 <a:solidFill>
                   <a:srgbClr val="0A2540"/>
                 </a:solidFill>
@@ -2628,19 +2628,19 @@
               </a:rPr>
               <a:t>Qualitative pilot evaluation</a:t>
             </a:r>
-            <a:endParaRPr lang="en-US" sz="1200" dirty="0"/>
-          </a:p>
-        </p:txBody>
-      </p:sp>
-      <p:sp>
-        <p:nvSpPr>
-          <p:cNvPr id="17" name="Shape 15"/>
-          <p:cNvSpPr/>
-          <p:nvPr/>
-        </p:nvSpPr>
-        <p:spPr>
-          <a:xfrm>
-            <a:off x="6858000" y="2926080"/>
+            <a:endParaRPr lang="en-US" sz="1500" dirty="0"/>
+          </a:p>
+        </p:txBody>
+      </p:sp>
+      <p:sp>
+        <p:nvSpPr>
+          <p:cNvPr id="20" name="Shape 18"/>
+          <p:cNvSpPr/>
+          <p:nvPr/>
+        </p:nvSpPr>
+        <p:spPr>
+          <a:xfrm>
+            <a:off x="6858000" y="2971800"/>
             <a:ext cx="4572000" cy="502920"/>
           </a:xfrm>
           <a:prstGeom prst="rect">
@@ -2661,13 +2661,13 @@
       </p:sp>
       <p:sp>
         <p:nvSpPr>
-          <p:cNvPr id="18" name="Text 16"/>
-          <p:cNvSpPr/>
-          <p:nvPr/>
-        </p:nvSpPr>
-        <p:spPr>
-          <a:xfrm>
-            <a:off x="7040880" y="2926080"/>
+          <p:cNvPr id="21" name="Text 19"/>
+          <p:cNvSpPr/>
+          <p:nvPr/>
+        </p:nvSpPr>
+        <p:spPr>
+          <a:xfrm>
+            <a:off x="7040880" y="2971800"/>
             <a:ext cx="1280160" cy="502920"/>
           </a:xfrm>
           <a:prstGeom prst="rect">
@@ -2692,21 +2692,21 @@
                 <a:ea typeface="Calibri" pitchFamily="34" charset="-122"/>
                 <a:cs typeface="Calibri" pitchFamily="34" charset="-120"/>
               </a:rPr>
-              <a:t>SAMPLE</a:t>
-            </a:r>
-            <a:endParaRPr lang="en-US" sz="1000" dirty="0"/>
-          </a:p>
-        </p:txBody>
-      </p:sp>
-      <p:sp>
-        <p:nvSpPr>
-          <p:cNvPr id="19" name="Text 17"/>
-          <p:cNvSpPr/>
-          <p:nvPr/>
-        </p:nvSpPr>
-        <p:spPr>
-          <a:xfrm>
-            <a:off x="8321040" y="2926080"/>
+              <a:t>DOMAIN</a:t>
+            </a:r>
+            <a:endParaRPr lang="en-US" sz="1200" dirty="0"/>
+          </a:p>
+        </p:txBody>
+      </p:sp>
+      <p:sp>
+        <p:nvSpPr>
+          <p:cNvPr id="22" name="Text 20"/>
+          <p:cNvSpPr/>
+          <p:nvPr/>
+        </p:nvSpPr>
+        <p:spPr>
+          <a:xfrm>
+            <a:off x="8321040" y="2971800"/>
             <a:ext cx="2926080" cy="502920"/>
           </a:xfrm>
           <a:prstGeom prst="rect">
@@ -2723,7 +2723,7 @@
               <a:buNone/>
             </a:pPr>
             <a:r>
-              <a:rPr lang="en-US" sz="1200" b="1" dirty="0">
+              <a:rPr lang="en-US" sz="1500" b="1" dirty="0">
                 <a:solidFill>
                   <a:srgbClr val="0A2540"/>
                 </a:solidFill>
@@ -2731,21 +2731,21 @@
                 <a:ea typeface="Calibri" pitchFamily="34" charset="-122"/>
                 <a:cs typeface="Calibri" pitchFamily="34" charset="-120"/>
               </a:rPr>
-              <a:t>1 random item per SOLO level</a:t>
-            </a:r>
-            <a:endParaRPr lang="en-US" sz="1200" dirty="0"/>
-          </a:p>
-        </p:txBody>
-      </p:sp>
-      <p:sp>
-        <p:nvSpPr>
-          <p:cNvPr id="20" name="Shape 18"/>
-          <p:cNvSpPr/>
-          <p:nvPr/>
-        </p:nvSpPr>
-        <p:spPr>
-          <a:xfrm>
-            <a:off x="6858000" y="3520440"/>
+              <a:t>Operating Systems · Software Testing</a:t>
+            </a:r>
+            <a:endParaRPr lang="en-US" sz="1500" dirty="0"/>
+          </a:p>
+        </p:txBody>
+      </p:sp>
+      <p:sp>
+        <p:nvSpPr>
+          <p:cNvPr id="23" name="Shape 21"/>
+          <p:cNvSpPr/>
+          <p:nvPr/>
+        </p:nvSpPr>
+        <p:spPr>
+          <a:xfrm>
+            <a:off x="6858000" y="3611879"/>
             <a:ext cx="4572000" cy="502920"/>
           </a:xfrm>
           <a:prstGeom prst="rect">
@@ -2766,13 +2766,13 @@
       </p:sp>
       <p:sp>
         <p:nvSpPr>
-          <p:cNvPr id="21" name="Text 19"/>
-          <p:cNvSpPr/>
-          <p:nvPr/>
-        </p:nvSpPr>
-        <p:spPr>
-          <a:xfrm>
-            <a:off x="7040880" y="3520440"/>
+          <p:cNvPr id="24" name="Text 22"/>
+          <p:cNvSpPr/>
+          <p:nvPr/>
+        </p:nvSpPr>
+        <p:spPr>
+          <a:xfrm>
+            <a:off x="7040880" y="3611879"/>
             <a:ext cx="1280160" cy="502920"/>
           </a:xfrm>
           <a:prstGeom prst="rect">
@@ -2797,21 +2797,21 @@
                 <a:ea typeface="Calibri" pitchFamily="34" charset="-122"/>
                 <a:cs typeface="Calibri" pitchFamily="34" charset="-120"/>
               </a:rPr>
-              <a:t>DOMAIN</a:t>
-            </a:r>
-            <a:endParaRPr lang="en-US" sz="1000" dirty="0"/>
-          </a:p>
-        </p:txBody>
-      </p:sp>
-      <p:sp>
-        <p:nvSpPr>
-          <p:cNvPr id="22" name="Text 20"/>
-          <p:cNvSpPr/>
-          <p:nvPr/>
-        </p:nvSpPr>
-        <p:spPr>
-          <a:xfrm>
-            <a:off x="8321040" y="3520440"/>
+              <a:t>FOCUS</a:t>
+            </a:r>
+            <a:endParaRPr lang="en-US" sz="1200" dirty="0"/>
+          </a:p>
+        </p:txBody>
+      </p:sp>
+      <p:sp>
+        <p:nvSpPr>
+          <p:cNvPr id="25" name="Text 23"/>
+          <p:cNvSpPr/>
+          <p:nvPr/>
+        </p:nvSpPr>
+        <p:spPr>
+          <a:xfrm>
+            <a:off x="8321040" y="3611879"/>
             <a:ext cx="2926080" cy="502920"/>
           </a:xfrm>
           <a:prstGeom prst="rect">
@@ -2828,7 +2828,7 @@
               <a:buNone/>
             </a:pPr>
             <a:r>
-              <a:rPr lang="en-US" sz="1200" b="1" dirty="0">
+              <a:rPr lang="en-US" sz="1500" b="1" dirty="0">
                 <a:solidFill>
                   <a:srgbClr val="0A2540"/>
                 </a:solidFill>
@@ -2836,114 +2836,9 @@
                 <a:ea typeface="Calibri" pitchFamily="34" charset="-122"/>
                 <a:cs typeface="Calibri" pitchFamily="34" charset="-120"/>
               </a:rPr>
-              <a:t>Operating Systems · Software Testing</a:t>
-            </a:r>
-            <a:endParaRPr lang="en-US" sz="1200" dirty="0"/>
-          </a:p>
-        </p:txBody>
-      </p:sp>
-      <p:sp>
-        <p:nvSpPr>
-          <p:cNvPr id="23" name="Shape 21"/>
-          <p:cNvSpPr/>
-          <p:nvPr/>
-        </p:nvSpPr>
-        <p:spPr>
-          <a:xfrm>
-            <a:off x="6858000" y="4114800"/>
-            <a:ext cx="4572000" cy="502920"/>
-          </a:xfrm>
-          <a:prstGeom prst="rect">
-            <a:avLst/>
-          </a:prstGeom>
-          <a:solidFill>
-            <a:srgbClr val="EEF2F7"/>
-          </a:solidFill>
-          <a:ln/>
-        </p:spPr>
-        <p:txBody>
-          <a:bodyPr/>
-          <a:lstStyle/>
-          <a:p>
-            <a:endParaRPr lang="en-US"/>
-          </a:p>
-        </p:txBody>
-      </p:sp>
-      <p:sp>
-        <p:nvSpPr>
-          <p:cNvPr id="24" name="Text 22"/>
-          <p:cNvSpPr/>
-          <p:nvPr/>
-        </p:nvSpPr>
-        <p:spPr>
-          <a:xfrm>
-            <a:off x="7040880" y="4114800"/>
-            <a:ext cx="1280160" cy="502920"/>
-          </a:xfrm>
-          <a:prstGeom prst="rect">
-            <a:avLst/>
-          </a:prstGeom>
-          <a:noFill/>
-          <a:ln/>
-        </p:spPr>
-        <p:txBody>
-          <a:bodyPr wrap="square" lIns="0" tIns="0" rIns="0" bIns="0" rtlCol="0" anchor="ctr"/>
-          <a:lstStyle/>
-          <a:p>
-            <a:pPr marL="0" indent="0" algn="l">
-              <a:buNone/>
-            </a:pPr>
-            <a:r>
-              <a:rPr lang="en-US" sz="1000" b="1" kern="0" spc="300" dirty="0">
-                <a:solidFill>
-                  <a:srgbClr val="475569"/>
-                </a:solidFill>
-                <a:latin typeface="Calibri" pitchFamily="34" charset="0"/>
-                <a:ea typeface="Calibri" pitchFamily="34" charset="-122"/>
-                <a:cs typeface="Calibri" pitchFamily="34" charset="-120"/>
-              </a:rPr>
-              <a:t>FOCUS</a:t>
-            </a:r>
-            <a:endParaRPr lang="en-US" sz="1000" dirty="0"/>
-          </a:p>
-        </p:txBody>
-      </p:sp>
-      <p:sp>
-        <p:nvSpPr>
-          <p:cNvPr id="25" name="Text 23"/>
-          <p:cNvSpPr/>
-          <p:nvPr/>
-        </p:nvSpPr>
-        <p:spPr>
-          <a:xfrm>
-            <a:off x="8321040" y="4114800"/>
-            <a:ext cx="2926080" cy="502920"/>
-          </a:xfrm>
-          <a:prstGeom prst="rect">
-            <a:avLst/>
-          </a:prstGeom>
-          <a:noFill/>
-          <a:ln/>
-        </p:spPr>
-        <p:txBody>
-          <a:bodyPr wrap="square" lIns="0" tIns="0" rIns="0" bIns="0" rtlCol="0" anchor="ctr"/>
-          <a:lstStyle/>
-          <a:p>
-            <a:pPr marL="0" indent="0" algn="l">
-              <a:buNone/>
-            </a:pPr>
-            <a:r>
-              <a:rPr lang="en-US" sz="1200" b="1" dirty="0">
-                <a:solidFill>
-                  <a:srgbClr val="0A2540"/>
-                </a:solidFill>
-                <a:latin typeface="Calibri" pitchFamily="34" charset="0"/>
-                <a:ea typeface="Calibri" pitchFamily="34" charset="-122"/>
-                <a:cs typeface="Calibri" pitchFamily="34" charset="-120"/>
-              </a:rPr>
               <a:t>Item validity &amp; distractor quality</a:t>
             </a:r>
-            <a:endParaRPr lang="en-US" sz="1200" dirty="0"/>
+            <a:endParaRPr lang="en-US" sz="1500" dirty="0"/>
           </a:p>
         </p:txBody>
       </p:sp>
@@ -3090,14 +2985,14 @@
       </p:grpSpPr>
       <p:sp>
         <p:nvSpPr>
-          <p:cNvPr id="2" name="Text 0"/>
-          <p:cNvSpPr/>
-          <p:nvPr/>
-        </p:nvSpPr>
-        <p:spPr>
-          <a:xfrm>
-            <a:off x="685800" y="502920"/>
-            <a:ext cx="10820095" cy="274320"/>
+          <p:cNvPr id="2" name="Section Tag"/>
+          <p:cNvSpPr/>
+          <p:nvPr/>
+        </p:nvSpPr>
+        <p:spPr>
+          <a:xfrm>
+            <a:off x="685800" y="365760"/>
+            <a:ext cx="10820095" cy="228600"/>
           </a:xfrm>
           <a:prstGeom prst="rect">
             <a:avLst/>
@@ -3129,14 +3024,14 @@
       </p:sp>
       <p:sp>
         <p:nvSpPr>
-          <p:cNvPr id="3" name="Text 1"/>
-          <p:cNvSpPr/>
-          <p:nvPr/>
-        </p:nvSpPr>
-        <p:spPr>
-          <a:xfrm>
-            <a:off x="685800" y="822960"/>
-            <a:ext cx="10820095" cy="640080"/>
+          <p:cNvPr id="3" name="Title"/>
+          <p:cNvSpPr/>
+          <p:nvPr/>
+        </p:nvSpPr>
+        <p:spPr>
+          <a:xfrm>
+            <a:off x="685800" y="640080"/>
+            <a:ext cx="10820095" cy="548640"/>
           </a:xfrm>
           <a:prstGeom prst="rect">
             <a:avLst/>
@@ -3152,7 +3047,7 @@
               <a:buNone/>
             </a:pPr>
             <a:r>
-              <a:rPr lang="en-US" sz="3200" b="1" dirty="0">
+              <a:rPr lang="en-US" sz="2800" b="1" dirty="0">
                 <a:solidFill>
                   <a:srgbClr val="0A2540"/>
                 </a:solidFill>
@@ -3160,22 +3055,22 @@
                 <a:ea typeface="Calibri" pitchFamily="34" charset="-122"/>
                 <a:cs typeface="Calibri" pitchFamily="34" charset="-120"/>
               </a:rPr>
-              <a:t>Unistructural - A Closer Look</a:t>
-            </a:r>
-            <a:endParaRPr lang="en-US" sz="3200" dirty="0"/>
-          </a:p>
-        </p:txBody>
-      </p:sp>
-      <p:sp>
-        <p:nvSpPr>
-          <p:cNvPr id="4" name="Shape 2"/>
-          <p:cNvSpPr/>
-          <p:nvPr/>
-        </p:nvSpPr>
-        <p:spPr>
-          <a:xfrm>
-            <a:off x="685800" y="1691640"/>
-            <a:ext cx="1554480" cy="365760"/>
+              <a:t>Extended Abstract - A Closer Look</a:t>
+            </a:r>
+            <a:endParaRPr lang="en-US" sz="2800" dirty="0"/>
+          </a:p>
+        </p:txBody>
+      </p:sp>
+      <p:sp>
+        <p:nvSpPr>
+          <p:cNvPr id="4" name="Badge BG"/>
+          <p:cNvSpPr/>
+          <p:nvPr/>
+        </p:nvSpPr>
+        <p:spPr>
+          <a:xfrm>
+            <a:off x="685800" y="1280160"/>
+            <a:ext cx="1828800" cy="320040"/>
           </a:xfrm>
           <a:prstGeom prst="roundRect">
             <a:avLst>
@@ -3188,31 +3083,6 @@
           <a:ln/>
         </p:spPr>
         <p:txBody>
-          <a:bodyPr/>
-          <a:lstStyle/>
-          <a:p>
-            <a:endParaRPr lang="en-US"/>
-          </a:p>
-        </p:txBody>
-      </p:sp>
-      <p:sp>
-        <p:nvSpPr>
-          <p:cNvPr id="5" name="Text 3"/>
-          <p:cNvSpPr/>
-          <p:nvPr/>
-        </p:nvSpPr>
-        <p:spPr>
-          <a:xfrm>
-            <a:off x="685800" y="1691640"/>
-            <a:ext cx="1554480" cy="365760"/>
-          </a:xfrm>
-          <a:prstGeom prst="rect">
-            <a:avLst/>
-          </a:prstGeom>
-          <a:noFill/>
-          <a:ln/>
-        </p:spPr>
-        <p:txBody>
           <a:bodyPr wrap="square" lIns="0" tIns="0" rIns="0" bIns="0" rtlCol="0" anchor="ctr"/>
           <a:lstStyle/>
           <a:p>
@@ -3228,7 +3098,7 @@
                 <a:ea typeface="Calibri" pitchFamily="34" charset="-122"/>
                 <a:cs typeface="Calibri" pitchFamily="34" charset="-120"/>
               </a:rPr>
-              <a:t>UNISTRUCTURAL</a:t>
+              <a:t>EXTENDED ABSTRACT</a:t>
             </a:r>
             <a:endParaRPr lang="en-US" sz="1000" dirty="0"/>
           </a:p>
@@ -3236,30 +3106,33 @@
       </p:sp>
       <p:sp>
         <p:nvSpPr>
-          <p:cNvPr id="6" name="Text 4"/>
-          <p:cNvSpPr/>
-          <p:nvPr/>
-        </p:nvSpPr>
-        <p:spPr>
-          <a:xfrm>
-            <a:off x="685800" y="2194560"/>
-            <a:ext cx="10820095" cy="548640"/>
-          </a:xfrm>
-          <a:prstGeom prst="rect">
-            <a:avLst/>
-          </a:prstGeom>
-          <a:noFill/>
-          <a:ln/>
-        </p:spPr>
-        <p:txBody>
-          <a:bodyPr wrap="square" lIns="0" tIns="0" rIns="0" bIns="0" rtlCol="0" anchor="ctr"/>
+          <p:cNvPr id="5" name="Question"/>
+          <p:cNvSpPr/>
+          <p:nvPr/>
+        </p:nvSpPr>
+        <p:spPr>
+          <a:xfrm>
+            <a:off x="685800" y="1737360"/>
+            <a:ext cx="10820095" cy="960120"/>
+          </a:xfrm>
+          <a:prstGeom prst="rect">
+            <a:avLst/>
+          </a:prstGeom>
+          <a:noFill/>
+          <a:ln/>
+        </p:spPr>
+        <p:txBody>
+          <a:bodyPr wrap="square" lIns="0" tIns="0" rIns="0" bIns="0" rtlCol="0" anchor="t"/>
           <a:lstStyle/>
           <a:p>
             <a:pPr marL="0" indent="0" algn="l">
-              <a:buNone/>
-            </a:pPr>
-            <a:r>
-              <a:rPr lang="en-US" sz="1800" b="1" dirty="0">
+              <a:lnSpc>
+                <a:spcPct val="120000"/>
+              </a:lnSpc>
+              <a:buNone/>
+            </a:pPr>
+            <a:r>
+              <a:rPr lang="en-US" sz="1500" b="1" dirty="0">
                 <a:solidFill>
                   <a:srgbClr val="0F172A"/>
                 </a:solidFill>
@@ -3267,22 +3140,22 @@
                 <a:ea typeface="Calibri" pitchFamily="34" charset="-122"/>
                 <a:cs typeface="Calibri" pitchFamily="34" charset="-120"/>
               </a:rPr>
-              <a:t>The Program Counter (PC) holds the memory address of which type of entity?</a:t>
-            </a:r>
-            <a:endParaRPr lang="en-US" sz="1800" dirty="0"/>
-          </a:p>
-        </p:txBody>
-      </p:sp>
-      <p:sp>
-        <p:nvSpPr>
-          <p:cNvPr id="7" name="Shape 5"/>
-          <p:cNvSpPr/>
-          <p:nvPr/>
-        </p:nvSpPr>
-        <p:spPr>
-          <a:xfrm>
-            <a:off x="685800" y="2971800"/>
-            <a:ext cx="5212080" cy="1371600"/>
+              <a:t>A web server receives 5,000 concurrent client connections, each requiring brief CPU work followed by long I/O waits. Spawning a full OS process per connection consumes too much memory due to PCB overhead. Which OS-level approach most effectively reduces per-connection overhead while still supporting concurrent execution?</a:t>
+            </a:r>
+            <a:endParaRPr lang="en-US" sz="1500" dirty="0"/>
+          </a:p>
+        </p:txBody>
+      </p:sp>
+      <p:sp>
+        <p:nvSpPr>
+          <p:cNvPr id="6" name="Card A"/>
+          <p:cNvSpPr/>
+          <p:nvPr/>
+        </p:nvSpPr>
+        <p:spPr>
+          <a:xfrm>
+            <a:off x="685800" y="3040380"/>
+            <a:ext cx="5212080" cy="1645920"/>
           </a:xfrm>
           <a:prstGeom prst="rect">
             <a:avLst/>
@@ -3307,7 +3180,7 @@
       </p:sp>
       <p:sp>
         <p:nvSpPr>
-          <p:cNvPr id="8" name="Shape 6"/>
+          <p:cNvPr id="7" name="A Circle"/>
           <p:cNvSpPr/>
           <p:nvPr/>
         </p:nvSpPr>
@@ -3320,36 +3193,11 @@
             <a:avLst/>
           </a:prstGeom>
           <a:solidFill>
-            <a:srgbClr val="10897A"/>
+            <a:srgbClr val="0F766E"/>
           </a:solidFill>
           <a:ln/>
         </p:spPr>
         <p:txBody>
-          <a:bodyPr/>
-          <a:lstStyle/>
-          <a:p>
-            <a:endParaRPr lang="en-US"/>
-          </a:p>
-        </p:txBody>
-      </p:sp>
-      <p:sp>
-        <p:nvSpPr>
-          <p:cNvPr id="9" name="Text 7"/>
-          <p:cNvSpPr/>
-          <p:nvPr/>
-        </p:nvSpPr>
-        <p:spPr>
-          <a:xfrm>
-            <a:off x="914400" y="3200400"/>
-            <a:ext cx="457200" cy="457200"/>
-          </a:xfrm>
-          <a:prstGeom prst="rect">
-            <a:avLst/>
-          </a:prstGeom>
-          <a:noFill/>
-          <a:ln/>
-        </p:spPr>
-        <p:txBody>
           <a:bodyPr wrap="square" lIns="0" tIns="0" rIns="0" bIns="0" rtlCol="0" anchor="ctr"/>
           <a:lstStyle/>
           <a:p>
@@ -3373,14 +3221,56 @@
       </p:sp>
       <p:sp>
         <p:nvSpPr>
-          <p:cNvPr id="10" name="Text 8"/>
-          <p:cNvSpPr/>
-          <p:nvPr/>
-        </p:nvSpPr>
-        <p:spPr>
-          <a:xfrm>
-            <a:off x="1463040" y="3136392"/>
-            <a:ext cx="4297680" cy="411480"/>
+          <p:cNvPr id="8" name="A Text"/>
+          <p:cNvSpPr/>
+          <p:nvPr/>
+        </p:nvSpPr>
+        <p:spPr>
+          <a:xfrm>
+            <a:off x="1554480" y="3154680"/>
+            <a:ext cx="4160520" cy="1051560"/>
+          </a:xfrm>
+          <a:prstGeom prst="rect">
+            <a:avLst/>
+          </a:prstGeom>
+          <a:noFill/>
+          <a:ln/>
+        </p:spPr>
+        <p:txBody>
+          <a:bodyPr wrap="square" lIns="0" tIns="0" rIns="0" bIns="0" rtlCol="0" anchor="t"/>
+          <a:lstStyle/>
+          <a:p>
+            <a:pPr marL="0" indent="0" algn="l">
+              <a:lnSpc>
+                <a:spcPct val="115000"/>
+              </a:lnSpc>
+              <a:buNone/>
+            </a:pPr>
+            <a:r>
+              <a:rPr lang="en-US" sz="1200" b="1" dirty="0">
+                <a:solidFill>
+                  <a:srgbClr val="0F172A"/>
+                </a:solidFill>
+                <a:latin typeface="Calibri" pitchFamily="34" charset="0"/>
+                <a:ea typeface="Calibri" pitchFamily="34" charset="-122"/>
+                <a:cs typeface="Calibri" pitchFamily="34" charset="-120"/>
+              </a:rPr>
+              <a:t>Use kernel-level threads sharing a single process address space, where each thread has only a small TCB and shares memory mappings with sibling threads.</a:t>
+            </a:r>
+            <a:endParaRPr lang="en-US" sz="1200" dirty="0"/>
+          </a:p>
+        </p:txBody>
+      </p:sp>
+      <p:sp>
+        <p:nvSpPr>
+          <p:cNvPr id="9" name="A Label"/>
+          <p:cNvSpPr/>
+          <p:nvPr/>
+        </p:nvSpPr>
+        <p:spPr>
+          <a:xfrm>
+            <a:off x="1554480" y="4230794"/>
+            <a:ext cx="4160520" cy="228600"/>
           </a:xfrm>
           <a:prstGeom prst="rect">
             <a:avLst/>
@@ -3396,69 +3286,69 @@
               <a:buNone/>
             </a:pPr>
             <a:r>
-              <a:rPr lang="en-US" sz="1200" b="1" dirty="0">
-                <a:solidFill>
-                  <a:srgbClr val="0F172A"/>
-                </a:solidFill>
-                <a:latin typeface="Calibri" pitchFamily="34" charset="0"/>
-                <a:ea typeface="Calibri" pitchFamily="34" charset="-122"/>
-                <a:cs typeface="Calibri" pitchFamily="34" charset="-120"/>
-              </a:rPr>
-              <a:t>The next instruction to be executed</a:t>
-            </a:r>
-            <a:endParaRPr lang="en-US" sz="1200" dirty="0"/>
-          </a:p>
-        </p:txBody>
-      </p:sp>
-      <p:sp>
-        <p:nvSpPr>
-          <p:cNvPr id="11" name="Text 9"/>
-          <p:cNvSpPr/>
-          <p:nvPr/>
-        </p:nvSpPr>
-        <p:spPr>
-          <a:xfrm>
-            <a:off x="1463040" y="3538728"/>
-            <a:ext cx="4297680" cy="274320"/>
-          </a:xfrm>
-          <a:prstGeom prst="rect">
-            <a:avLst/>
-          </a:prstGeom>
-          <a:noFill/>
-          <a:ln/>
-        </p:spPr>
-        <p:txBody>
-          <a:bodyPr wrap="square" lIns="0" tIns="0" rIns="0" bIns="0" rtlCol="0" anchor="ctr"/>
+              <a:rPr lang="en-US" sz="1000" b="1" kern="0" spc="300" dirty="0">
+                <a:solidFill>
+                  <a:srgbClr val="0F766E"/>
+                </a:solidFill>
+                <a:latin typeface="Calibri" pitchFamily="34" charset="0"/>
+                <a:ea typeface="Calibri" pitchFamily="34" charset="-122"/>
+                <a:cs typeface="Calibri" pitchFamily="34" charset="-120"/>
+              </a:rPr>
+              <a:t>CORRECT</a:t>
+            </a:r>
+            <a:endParaRPr lang="en-US" sz="1000" dirty="0"/>
+          </a:p>
+        </p:txBody>
+      </p:sp>
+      <p:sp>
+        <p:nvSpPr>
+          <p:cNvPr id="10" name="A Explain"/>
+          <p:cNvSpPr/>
+          <p:nvPr/>
+        </p:nvSpPr>
+        <p:spPr>
+          <a:xfrm>
+            <a:off x="1554480" y="4459394"/>
+            <a:ext cx="4160520" cy="320040"/>
+          </a:xfrm>
+          <a:prstGeom prst="rect">
+            <a:avLst/>
+          </a:prstGeom>
+          <a:noFill/>
+          <a:ln/>
+        </p:spPr>
+        <p:txBody>
+          <a:bodyPr wrap="square" lIns="0" tIns="0" rIns="0" bIns="0" rtlCol="0" anchor="t"/>
           <a:lstStyle/>
           <a:p>
             <a:pPr marL="0" indent="0" algn="l">
               <a:buNone/>
             </a:pPr>
             <a:r>
-              <a:rPr lang="en-US" sz="900" b="1" kern="0" spc="300" dirty="0">
-                <a:solidFill>
-                  <a:srgbClr val="10897A"/>
-                </a:solidFill>
-                <a:latin typeface="Calibri" pitchFamily="34" charset="0"/>
-                <a:ea typeface="Calibri" pitchFamily="34" charset="-122"/>
-                <a:cs typeface="Calibri" pitchFamily="34" charset="-120"/>
-              </a:rPr>
-              <a:t>CORRECT</a:t>
-            </a:r>
-            <a:endParaRPr lang="en-US" sz="900" dirty="0"/>
-          </a:p>
-        </p:txBody>
-      </p:sp>
-      <p:sp>
-        <p:nvSpPr>
-          <p:cNvPr id="12" name="Shape 10"/>
-          <p:cNvSpPr/>
-          <p:nvPr/>
-        </p:nvSpPr>
-        <p:spPr>
-          <a:xfrm>
-            <a:off x="6263640" y="2971800"/>
-            <a:ext cx="5212080" cy="1371600"/>
+              <a:rPr lang="en-US" sz="1000" i="1" dirty="0">
+                <a:solidFill>
+                  <a:srgbClr val="475569"/>
+                </a:solidFill>
+                <a:latin typeface="Calibri" pitchFamily="34" charset="0"/>
+                <a:ea typeface="Calibri" pitchFamily="34" charset="-122"/>
+                <a:cs typeface="Calibri" pitchFamily="34" charset="-120"/>
+              </a:rPr>
+              <a:t>Threads share address space; minimal per-connection cost</a:t>
+            </a:r>
+            <a:endParaRPr lang="en-US" sz="1000" dirty="0"/>
+          </a:p>
+        </p:txBody>
+      </p:sp>
+      <p:sp>
+        <p:nvSpPr>
+          <p:cNvPr id="11" name="Card B"/>
+          <p:cNvSpPr/>
+          <p:nvPr/>
+        </p:nvSpPr>
+        <p:spPr>
+          <a:xfrm>
+            <a:off x="6293815" y="3017520"/>
+            <a:ext cx="5212080" cy="1645920"/>
           </a:xfrm>
           <a:prstGeom prst="rect">
             <a:avLst/>
@@ -3483,13 +3373,13 @@
       </p:sp>
       <p:sp>
         <p:nvSpPr>
-          <p:cNvPr id="13" name="Shape 11"/>
-          <p:cNvSpPr/>
-          <p:nvPr/>
-        </p:nvSpPr>
-        <p:spPr>
-          <a:xfrm>
-            <a:off x="6492240" y="3200400"/>
+          <p:cNvPr id="12" name="B Circle"/>
+          <p:cNvSpPr/>
+          <p:nvPr/>
+        </p:nvSpPr>
+        <p:spPr>
+          <a:xfrm>
+            <a:off x="6522415" y="3200400"/>
             <a:ext cx="457200" cy="457200"/>
           </a:xfrm>
           <a:prstGeom prst="ellipse">
@@ -3501,31 +3391,6 @@
           <a:ln/>
         </p:spPr>
         <p:txBody>
-          <a:bodyPr/>
-          <a:lstStyle/>
-          <a:p>
-            <a:endParaRPr lang="en-US"/>
-          </a:p>
-        </p:txBody>
-      </p:sp>
-      <p:sp>
-        <p:nvSpPr>
-          <p:cNvPr id="14" name="Text 12"/>
-          <p:cNvSpPr/>
-          <p:nvPr/>
-        </p:nvSpPr>
-        <p:spPr>
-          <a:xfrm>
-            <a:off x="6492240" y="3200400"/>
-            <a:ext cx="457200" cy="457200"/>
-          </a:xfrm>
-          <a:prstGeom prst="rect">
-            <a:avLst/>
-          </a:prstGeom>
-          <a:noFill/>
-          <a:ln/>
-        </p:spPr>
-        <p:txBody>
           <a:bodyPr wrap="square" lIns="0" tIns="0" rIns="0" bIns="0" rtlCol="0" anchor="ctr"/>
           <a:lstStyle/>
           <a:p>
@@ -3549,14 +3414,56 @@
       </p:sp>
       <p:sp>
         <p:nvSpPr>
-          <p:cNvPr id="15" name="Text 13"/>
-          <p:cNvSpPr/>
-          <p:nvPr/>
-        </p:nvSpPr>
-        <p:spPr>
-          <a:xfrm>
-            <a:off x="7040880" y="3136392"/>
-            <a:ext cx="4297680" cy="411480"/>
+          <p:cNvPr id="13" name="B Text"/>
+          <p:cNvSpPr/>
+          <p:nvPr/>
+        </p:nvSpPr>
+        <p:spPr>
+          <a:xfrm>
+            <a:off x="7162495" y="3154680"/>
+            <a:ext cx="4160520" cy="1051560"/>
+          </a:xfrm>
+          <a:prstGeom prst="rect">
+            <a:avLst/>
+          </a:prstGeom>
+          <a:noFill/>
+          <a:ln/>
+        </p:spPr>
+        <p:txBody>
+          <a:bodyPr wrap="square" lIns="0" tIns="0" rIns="0" bIns="0" rtlCol="0" anchor="t"/>
+          <a:lstStyle/>
+          <a:p>
+            <a:pPr marL="0" indent="0" algn="l">
+              <a:lnSpc>
+                <a:spcPct val="115000"/>
+              </a:lnSpc>
+              <a:buNone/>
+            </a:pPr>
+            <a:r>
+              <a:rPr lang="en-US" sz="1200" b="1" dirty="0">
+                <a:solidFill>
+                  <a:srgbClr val="0F172A"/>
+                </a:solidFill>
+                <a:latin typeface="Calibri" pitchFamily="34" charset="0"/>
+                <a:ea typeface="Calibri" pitchFamily="34" charset="-122"/>
+                <a:cs typeface="Calibri" pitchFamily="34" charset="-120"/>
+              </a:rPr>
+              <a:t>Use a single process with fork() called only when CPU work is needed, terminating each child immediately after the work completes to reclaim its PCB.</a:t>
+            </a:r>
+            <a:endParaRPr lang="en-US" sz="1200" dirty="0"/>
+          </a:p>
+        </p:txBody>
+      </p:sp>
+      <p:sp>
+        <p:nvSpPr>
+          <p:cNvPr id="14" name="B Label"/>
+          <p:cNvSpPr/>
+          <p:nvPr/>
+        </p:nvSpPr>
+        <p:spPr>
+          <a:xfrm>
+            <a:off x="7162495" y="4160520"/>
+            <a:ext cx="4160520" cy="228600"/>
           </a:xfrm>
           <a:prstGeom prst="rect">
             <a:avLst/>
@@ -3572,84 +3479,45 @@
               <a:buNone/>
             </a:pPr>
             <a:r>
-              <a:rPr lang="en-US" sz="1200" b="1" dirty="0">
-                <a:solidFill>
-                  <a:srgbClr val="0F172A"/>
-                </a:solidFill>
-                <a:latin typeface="Calibri" pitchFamily="34" charset="0"/>
-                <a:ea typeface="Calibri" pitchFamily="34" charset="-122"/>
-                <a:cs typeface="Calibri" pitchFamily="34" charset="-120"/>
-              </a:rPr>
-              <a:t>The current executing instruction</a:t>
-            </a:r>
-            <a:endParaRPr lang="en-US" sz="1200" dirty="0"/>
-          </a:p>
-        </p:txBody>
-      </p:sp>
-      <p:sp>
-        <p:nvSpPr>
-          <p:cNvPr id="16" name="Text 14"/>
-          <p:cNvSpPr/>
-          <p:nvPr/>
-        </p:nvSpPr>
-        <p:spPr>
-          <a:xfrm>
-            <a:off x="7040880" y="3538728"/>
-            <a:ext cx="4297680" cy="274320"/>
-          </a:xfrm>
-          <a:prstGeom prst="rect">
-            <a:avLst/>
-          </a:prstGeom>
-          <a:noFill/>
-          <a:ln/>
-        </p:spPr>
-        <p:txBody>
-          <a:bodyPr wrap="square" lIns="0" tIns="0" rIns="0" bIns="0" rtlCol="0" anchor="ctr"/>
+              <a:rPr lang="en-US" sz="1000" b="1" kern="0" spc="300" dirty="0">
+                <a:solidFill>
+                  <a:srgbClr val="1E5F8E"/>
+                </a:solidFill>
+                <a:latin typeface="Calibri" pitchFamily="34" charset="0"/>
+                <a:ea typeface="Calibri" pitchFamily="34" charset="-122"/>
+                <a:cs typeface="Calibri" pitchFamily="34" charset="-120"/>
+              </a:rPr>
+              <a:t>STRONG DISTRACTOR</a:t>
+            </a:r>
+            <a:endParaRPr lang="en-US" sz="1000" dirty="0"/>
+          </a:p>
+        </p:txBody>
+      </p:sp>
+      <p:sp>
+        <p:nvSpPr>
+          <p:cNvPr id="15" name="B Explain"/>
+          <p:cNvSpPr/>
+          <p:nvPr/>
+        </p:nvSpPr>
+        <p:spPr>
+          <a:xfrm>
+            <a:off x="7162495" y="4448387"/>
+            <a:ext cx="4160520" cy="320040"/>
+          </a:xfrm>
+          <a:prstGeom prst="rect">
+            <a:avLst/>
+          </a:prstGeom>
+          <a:noFill/>
+          <a:ln/>
+        </p:spPr>
+        <p:txBody>
+          <a:bodyPr wrap="square" lIns="0" tIns="0" rIns="0" bIns="0" rtlCol="0" anchor="t"/>
           <a:lstStyle/>
           <a:p>
             <a:pPr marL="0" indent="0" algn="l">
               <a:buNone/>
             </a:pPr>
             <a:r>
-              <a:rPr lang="en-US" sz="900" b="1" kern="0" spc="300" dirty="0">
-                <a:solidFill>
-                  <a:srgbClr val="0A2540"/>
-                </a:solidFill>
-                <a:latin typeface="Calibri" pitchFamily="34" charset="0"/>
-                <a:ea typeface="Calibri" pitchFamily="34" charset="-122"/>
-                <a:cs typeface="Calibri" pitchFamily="34" charset="-120"/>
-              </a:rPr>
-              <a:t>STRONG DISTRACTOR</a:t>
-            </a:r>
-            <a:endParaRPr lang="en-US" sz="900" dirty="0"/>
-          </a:p>
-        </p:txBody>
-      </p:sp>
-      <p:sp>
-        <p:nvSpPr>
-          <p:cNvPr id="17" name="Text 15"/>
-          <p:cNvSpPr/>
-          <p:nvPr/>
-        </p:nvSpPr>
-        <p:spPr>
-          <a:xfrm>
-            <a:off x="7040880" y="3813048"/>
-            <a:ext cx="4297680" cy="457200"/>
-          </a:xfrm>
-          <a:prstGeom prst="rect">
-            <a:avLst/>
-          </a:prstGeom>
-          <a:noFill/>
-          <a:ln/>
-        </p:spPr>
-        <p:txBody>
-          <a:bodyPr wrap="square" lIns="0" tIns="0" rIns="0" bIns="0" rtlCol="0" anchor="t"/>
-          <a:lstStyle/>
-          <a:p>
-            <a:pPr marL="0" indent="0" algn="l">
-              <a:buNone/>
-            </a:pPr>
-            <a:r>
               <a:rPr lang="en-US" sz="1000" i="1" dirty="0">
                 <a:solidFill>
                   <a:srgbClr val="475569"/>
@@ -3658,7 +3526,7 @@
                 <a:ea typeface="Calibri" pitchFamily="34" charset="-122"/>
                 <a:cs typeface="Calibri" pitchFamily="34" charset="-120"/>
               </a:rPr>
-              <a:t>Exploits temporal confusion (next vs. current)</a:t>
+              <a:t>fork() still creates full PCBs; 5,000 cycles is expensive</a:t>
             </a:r>
             <a:endParaRPr lang="en-US" sz="1000" dirty="0"/>
           </a:p>
@@ -3666,14 +3534,14 @@
       </p:sp>
       <p:sp>
         <p:nvSpPr>
-          <p:cNvPr id="18" name="Shape 16"/>
-          <p:cNvSpPr/>
-          <p:nvPr/>
-        </p:nvSpPr>
-        <p:spPr>
-          <a:xfrm>
-            <a:off x="685800" y="4572000"/>
-            <a:ext cx="5212080" cy="1371600"/>
+          <p:cNvPr id="16" name="Card C"/>
+          <p:cNvSpPr/>
+          <p:nvPr/>
+        </p:nvSpPr>
+        <p:spPr>
+          <a:xfrm>
+            <a:off x="685800" y="4766733"/>
+            <a:ext cx="5212080" cy="1554480"/>
           </a:xfrm>
           <a:prstGeom prst="rect">
             <a:avLst/>
@@ -3698,49 +3566,24 @@
       </p:sp>
       <p:sp>
         <p:nvSpPr>
-          <p:cNvPr id="19" name="Shape 17"/>
-          <p:cNvSpPr/>
-          <p:nvPr/>
-        </p:nvSpPr>
-        <p:spPr>
-          <a:xfrm>
-            <a:off x="914400" y="4800600"/>
+          <p:cNvPr id="17" name="C Circle"/>
+          <p:cNvSpPr/>
+          <p:nvPr/>
+        </p:nvSpPr>
+        <p:spPr>
+          <a:xfrm>
+            <a:off x="914400" y="4937760"/>
             <a:ext cx="457200" cy="457200"/>
           </a:xfrm>
           <a:prstGeom prst="ellipse">
             <a:avLst/>
           </a:prstGeom>
           <a:solidFill>
-            <a:srgbClr val="1C7293"/>
+            <a:srgbClr val="1E5F8E"/>
           </a:solidFill>
           <a:ln/>
         </p:spPr>
         <p:txBody>
-          <a:bodyPr/>
-          <a:lstStyle/>
-          <a:p>
-            <a:endParaRPr lang="en-US"/>
-          </a:p>
-        </p:txBody>
-      </p:sp>
-      <p:sp>
-        <p:nvSpPr>
-          <p:cNvPr id="20" name="Text 18"/>
-          <p:cNvSpPr/>
-          <p:nvPr/>
-        </p:nvSpPr>
-        <p:spPr>
-          <a:xfrm>
-            <a:off x="914400" y="4800600"/>
-            <a:ext cx="457200" cy="457200"/>
-          </a:xfrm>
-          <a:prstGeom prst="rect">
-            <a:avLst/>
-          </a:prstGeom>
-          <a:noFill/>
-          <a:ln/>
-        </p:spPr>
-        <p:txBody>
           <a:bodyPr wrap="square" lIns="0" tIns="0" rIns="0" bIns="0" rtlCol="0" anchor="ctr"/>
           <a:lstStyle/>
           <a:p>
@@ -3764,14 +3607,56 @@
       </p:sp>
       <p:sp>
         <p:nvSpPr>
-          <p:cNvPr id="21" name="Text 19"/>
-          <p:cNvSpPr/>
-          <p:nvPr/>
-        </p:nvSpPr>
-        <p:spPr>
-          <a:xfrm>
-            <a:off x="1463040" y="4736592"/>
-            <a:ext cx="4297680" cy="411480"/>
+          <p:cNvPr id="18" name="C Text"/>
+          <p:cNvSpPr/>
+          <p:nvPr/>
+        </p:nvSpPr>
+        <p:spPr>
+          <a:xfrm>
+            <a:off x="1554480" y="4892040"/>
+            <a:ext cx="4160520" cy="868680"/>
+          </a:xfrm>
+          <a:prstGeom prst="rect">
+            <a:avLst/>
+          </a:prstGeom>
+          <a:noFill/>
+          <a:ln/>
+        </p:spPr>
+        <p:txBody>
+          <a:bodyPr wrap="square" lIns="0" tIns="0" rIns="0" bIns="0" rtlCol="0" anchor="t"/>
+          <a:lstStyle/>
+          <a:p>
+            <a:pPr marL="0" indent="0" algn="l">
+              <a:lnSpc>
+                <a:spcPct val="115000"/>
+              </a:lnSpc>
+              <a:buNone/>
+            </a:pPr>
+            <a:r>
+              <a:rPr lang="en-US" sz="1200" b="1" dirty="0">
+                <a:solidFill>
+                  <a:srgbClr val="0F172A"/>
+                </a:solidFill>
+                <a:latin typeface="Calibri" pitchFamily="34" charset="0"/>
+                <a:ea typeface="Calibri" pitchFamily="34" charset="-122"/>
+                <a:cs typeface="Calibri" pitchFamily="34" charset="-120"/>
+              </a:rPr>
+              <a:t>Spawn 5,000 processes upfront at server startup and reuse them via a queue, avoiding per-request PCB allocation costs at runtime.</a:t>
+            </a:r>
+            <a:endParaRPr lang="en-US" sz="1200" dirty="0"/>
+          </a:p>
+        </p:txBody>
+      </p:sp>
+      <p:sp>
+        <p:nvSpPr>
+          <p:cNvPr id="19" name="C Label"/>
+          <p:cNvSpPr/>
+          <p:nvPr/>
+        </p:nvSpPr>
+        <p:spPr>
+          <a:xfrm>
+            <a:off x="1554480" y="5826759"/>
+            <a:ext cx="4160520" cy="228600"/>
           </a:xfrm>
           <a:prstGeom prst="rect">
             <a:avLst/>
@@ -3787,84 +3672,45 @@
               <a:buNone/>
             </a:pPr>
             <a:r>
-              <a:rPr lang="en-US" sz="1200" b="1" dirty="0">
-                <a:solidFill>
-                  <a:srgbClr val="0F172A"/>
-                </a:solidFill>
-                <a:latin typeface="Calibri" pitchFamily="34" charset="0"/>
-                <a:ea typeface="Calibri" pitchFamily="34" charset="-122"/>
-                <a:cs typeface="Calibri" pitchFamily="34" charset="-120"/>
-              </a:rPr>
-              <a:t>All instructions in memory</a:t>
-            </a:r>
-            <a:endParaRPr lang="en-US" sz="1200" dirty="0"/>
-          </a:p>
-        </p:txBody>
-      </p:sp>
-      <p:sp>
-        <p:nvSpPr>
-          <p:cNvPr id="22" name="Text 20"/>
-          <p:cNvSpPr/>
-          <p:nvPr/>
-        </p:nvSpPr>
-        <p:spPr>
-          <a:xfrm>
-            <a:off x="1463040" y="5138928"/>
-            <a:ext cx="4297680" cy="274320"/>
-          </a:xfrm>
-          <a:prstGeom prst="rect">
-            <a:avLst/>
-          </a:prstGeom>
-          <a:noFill/>
-          <a:ln/>
-        </p:spPr>
-        <p:txBody>
-          <a:bodyPr wrap="square" lIns="0" tIns="0" rIns="0" bIns="0" rtlCol="0" anchor="ctr"/>
+              <a:rPr lang="en-US" sz="1000" b="1" kern="0" spc="300" dirty="0">
+                <a:solidFill>
+                  <a:srgbClr val="1E5F8E"/>
+                </a:solidFill>
+                <a:latin typeface="Calibri" pitchFamily="34" charset="0"/>
+                <a:ea typeface="Calibri" pitchFamily="34" charset="-122"/>
+                <a:cs typeface="Calibri" pitchFamily="34" charset="-120"/>
+              </a:rPr>
+              <a:t>STRONG DISTRACTOR</a:t>
+            </a:r>
+            <a:endParaRPr lang="en-US" sz="1000" dirty="0"/>
+          </a:p>
+        </p:txBody>
+      </p:sp>
+      <p:sp>
+        <p:nvSpPr>
+          <p:cNvPr id="20" name="C Explain"/>
+          <p:cNvSpPr/>
+          <p:nvPr/>
+        </p:nvSpPr>
+        <p:spPr>
+          <a:xfrm>
+            <a:off x="1554480" y="6080760"/>
+            <a:ext cx="4160520" cy="228600"/>
+          </a:xfrm>
+          <a:prstGeom prst="rect">
+            <a:avLst/>
+          </a:prstGeom>
+          <a:noFill/>
+          <a:ln/>
+        </p:spPr>
+        <p:txBody>
+          <a:bodyPr wrap="square" lIns="0" tIns="0" rIns="0" bIns="0" rtlCol="0" anchor="t"/>
           <a:lstStyle/>
           <a:p>
             <a:pPr marL="0" indent="0" algn="l">
               <a:buNone/>
             </a:pPr>
             <a:r>
-              <a:rPr lang="en-US" sz="900" b="1" kern="0" spc="300" dirty="0">
-                <a:solidFill>
-                  <a:srgbClr val="1C7293"/>
-                </a:solidFill>
-                <a:latin typeface="Calibri" pitchFamily="34" charset="0"/>
-                <a:ea typeface="Calibri" pitchFamily="34" charset="-122"/>
-                <a:cs typeface="Calibri" pitchFamily="34" charset="-120"/>
-              </a:rPr>
-              <a:t>MEDIUM DISTRACTOR</a:t>
-            </a:r>
-            <a:endParaRPr lang="en-US" sz="900" dirty="0"/>
-          </a:p>
-        </p:txBody>
-      </p:sp>
-      <p:sp>
-        <p:nvSpPr>
-          <p:cNvPr id="23" name="Text 21"/>
-          <p:cNvSpPr/>
-          <p:nvPr/>
-        </p:nvSpPr>
-        <p:spPr>
-          <a:xfrm>
-            <a:off x="1463040" y="5413248"/>
-            <a:ext cx="4297680" cy="457200"/>
-          </a:xfrm>
-          <a:prstGeom prst="rect">
-            <a:avLst/>
-          </a:prstGeom>
-          <a:noFill/>
-          <a:ln/>
-        </p:spPr>
-        <p:txBody>
-          <a:bodyPr wrap="square" lIns="0" tIns="0" rIns="0" bIns="0" rtlCol="0" anchor="t"/>
-          <a:lstStyle/>
-          <a:p>
-            <a:pPr marL="0" indent="0" algn="l">
-              <a:buNone/>
-            </a:pPr>
-            <a:r>
               <a:rPr lang="en-US" sz="1000" i="1" dirty="0">
                 <a:solidFill>
                   <a:srgbClr val="475569"/>
@@ -3873,7 +3719,7 @@
                 <a:ea typeface="Calibri" pitchFamily="34" charset="-122"/>
                 <a:cs typeface="Calibri" pitchFamily="34" charset="-120"/>
               </a:rPr>
-              <a:t>Targets register-scope misconception</a:t>
+              <a:t>Pre-allocating still consumes 5,000x PCB memory upfront</a:t>
             </a:r>
             <a:endParaRPr lang="en-US" sz="1000" dirty="0"/>
           </a:p>
@@ -3881,14 +3727,14 @@
       </p:sp>
       <p:sp>
         <p:nvSpPr>
-          <p:cNvPr id="24" name="Shape 22"/>
-          <p:cNvSpPr/>
-          <p:nvPr/>
-        </p:nvSpPr>
-        <p:spPr>
-          <a:xfrm>
-            <a:off x="6263640" y="4572000"/>
-            <a:ext cx="5212080" cy="1371600"/>
+          <p:cNvPr id="21" name="Card D"/>
+          <p:cNvSpPr/>
+          <p:nvPr/>
+        </p:nvSpPr>
+        <p:spPr>
+          <a:xfrm>
+            <a:off x="6293815" y="4754880"/>
+            <a:ext cx="5212080" cy="1554480"/>
           </a:xfrm>
           <a:prstGeom prst="rect">
             <a:avLst/>
@@ -3913,13 +3759,13 @@
       </p:sp>
       <p:sp>
         <p:nvSpPr>
-          <p:cNvPr id="25" name="Shape 23"/>
-          <p:cNvSpPr/>
-          <p:nvPr/>
-        </p:nvSpPr>
-        <p:spPr>
-          <a:xfrm>
-            <a:off x="6492240" y="4800600"/>
+          <p:cNvPr id="22" name="D Circle"/>
+          <p:cNvSpPr/>
+          <p:nvPr/>
+        </p:nvSpPr>
+        <p:spPr>
+          <a:xfrm>
+            <a:off x="6522415" y="4937760"/>
             <a:ext cx="457200" cy="457200"/>
           </a:xfrm>
           <a:prstGeom prst="ellipse">
@@ -3931,31 +3777,6 @@
           <a:ln/>
         </p:spPr>
         <p:txBody>
-          <a:bodyPr/>
-          <a:lstStyle/>
-          <a:p>
-            <a:endParaRPr lang="en-US"/>
-          </a:p>
-        </p:txBody>
-      </p:sp>
-      <p:sp>
-        <p:nvSpPr>
-          <p:cNvPr id="26" name="Text 24"/>
-          <p:cNvSpPr/>
-          <p:nvPr/>
-        </p:nvSpPr>
-        <p:spPr>
-          <a:xfrm>
-            <a:off x="6492240" y="4800600"/>
-            <a:ext cx="457200" cy="457200"/>
-          </a:xfrm>
-          <a:prstGeom prst="rect">
-            <a:avLst/>
-          </a:prstGeom>
-          <a:noFill/>
-          <a:ln/>
-        </p:spPr>
-        <p:txBody>
           <a:bodyPr wrap="square" lIns="0" tIns="0" rIns="0" bIns="0" rtlCol="0" anchor="ctr"/>
           <a:lstStyle/>
           <a:p>
@@ -3979,14 +3800,56 @@
       </p:sp>
       <p:sp>
         <p:nvSpPr>
-          <p:cNvPr id="27" name="Text 25"/>
-          <p:cNvSpPr/>
-          <p:nvPr/>
-        </p:nvSpPr>
-        <p:spPr>
-          <a:xfrm>
-            <a:off x="7040880" y="4736592"/>
-            <a:ext cx="4297680" cy="411480"/>
+          <p:cNvPr id="23" name="D Text"/>
+          <p:cNvSpPr/>
+          <p:nvPr/>
+        </p:nvSpPr>
+        <p:spPr>
+          <a:xfrm>
+            <a:off x="7162495" y="4892040"/>
+            <a:ext cx="4160520" cy="868680"/>
+          </a:xfrm>
+          <a:prstGeom prst="rect">
+            <a:avLst/>
+          </a:prstGeom>
+          <a:noFill/>
+          <a:ln/>
+        </p:spPr>
+        <p:txBody>
+          <a:bodyPr wrap="square" lIns="0" tIns="0" rIns="0" bIns="0" rtlCol="0" anchor="t"/>
+          <a:lstStyle/>
+          <a:p>
+            <a:pPr marL="0" indent="0" algn="l">
+              <a:lnSpc>
+                <a:spcPct val="115000"/>
+              </a:lnSpc>
+              <a:buNone/>
+            </a:pPr>
+            <a:r>
+              <a:rPr lang="en-US" sz="1200" b="1" dirty="0">
+                <a:solidFill>
+                  <a:srgbClr val="0F172A"/>
+                </a:solidFill>
+                <a:latin typeface="Calibri" pitchFamily="34" charset="0"/>
+                <a:ea typeface="Calibri" pitchFamily="34" charset="-122"/>
+                <a:cs typeface="Calibri" pitchFamily="34" charset="-120"/>
+              </a:rPr>
+              <a:t>Disable context switching entirely so the OS doesn’t need to save state in PCBs or TCBs, processing connections strictly in arrival order.</a:t>
+            </a:r>
+            <a:endParaRPr lang="en-US" sz="1200" dirty="0"/>
+          </a:p>
+        </p:txBody>
+      </p:sp>
+      <p:sp>
+        <p:nvSpPr>
+          <p:cNvPr id="24" name="D Label"/>
+          <p:cNvSpPr/>
+          <p:nvPr/>
+        </p:nvSpPr>
+        <p:spPr>
+          <a:xfrm>
+            <a:off x="7162495" y="5825066"/>
+            <a:ext cx="4160520" cy="228600"/>
           </a:xfrm>
           <a:prstGeom prst="rect">
             <a:avLst/>
@@ -4002,84 +3865,45 @@
               <a:buNone/>
             </a:pPr>
             <a:r>
-              <a:rPr lang="en-US" sz="1200" b="1" dirty="0">
-                <a:solidFill>
-                  <a:srgbClr val="0F172A"/>
-                </a:solidFill>
-                <a:latin typeface="Calibri" pitchFamily="34" charset="0"/>
-                <a:ea typeface="Calibri" pitchFamily="34" charset="-122"/>
-                <a:cs typeface="Calibri" pitchFamily="34" charset="-120"/>
-              </a:rPr>
-              <a:t>Data variables</a:t>
-            </a:r>
-            <a:endParaRPr lang="en-US" sz="1200" dirty="0"/>
-          </a:p>
-        </p:txBody>
-      </p:sp>
-      <p:sp>
-        <p:nvSpPr>
-          <p:cNvPr id="28" name="Text 26"/>
-          <p:cNvSpPr/>
-          <p:nvPr/>
-        </p:nvSpPr>
-        <p:spPr>
-          <a:xfrm>
-            <a:off x="7040880" y="5138928"/>
-            <a:ext cx="4297680" cy="274320"/>
-          </a:xfrm>
-          <a:prstGeom prst="rect">
-            <a:avLst/>
-          </a:prstGeom>
-          <a:noFill/>
-          <a:ln/>
-        </p:spPr>
-        <p:txBody>
-          <a:bodyPr wrap="square" lIns="0" tIns="0" rIns="0" bIns="0" rtlCol="0" anchor="ctr"/>
+              <a:rPr lang="en-US" sz="1000" b="1" kern="0" spc="300" dirty="0">
+                <a:solidFill>
+                  <a:srgbClr val="E07A3E"/>
+                </a:solidFill>
+                <a:latin typeface="Calibri" pitchFamily="34" charset="0"/>
+                <a:ea typeface="Calibri" pitchFamily="34" charset="-122"/>
+                <a:cs typeface="Calibri" pitchFamily="34" charset="-120"/>
+              </a:rPr>
+              <a:t>WEAK DISTRACTOR</a:t>
+            </a:r>
+            <a:endParaRPr lang="en-US" sz="1000" dirty="0"/>
+          </a:p>
+        </p:txBody>
+      </p:sp>
+      <p:sp>
+        <p:nvSpPr>
+          <p:cNvPr id="25" name="D Explain"/>
+          <p:cNvSpPr/>
+          <p:nvPr/>
+        </p:nvSpPr>
+        <p:spPr>
+          <a:xfrm>
+            <a:off x="7162495" y="6076526"/>
+            <a:ext cx="4160520" cy="228600"/>
+          </a:xfrm>
+          <a:prstGeom prst="rect">
+            <a:avLst/>
+          </a:prstGeom>
+          <a:noFill/>
+          <a:ln/>
+        </p:spPr>
+        <p:txBody>
+          <a:bodyPr wrap="square" lIns="0" tIns="0" rIns="0" bIns="0" rtlCol="0" anchor="t"/>
           <a:lstStyle/>
           <a:p>
             <a:pPr marL="0" indent="0" algn="l">
               <a:buNone/>
             </a:pPr>
             <a:r>
-              <a:rPr lang="en-US" sz="900" b="1" kern="0" spc="300" dirty="0">
-                <a:solidFill>
-                  <a:srgbClr val="E07A3E"/>
-                </a:solidFill>
-                <a:latin typeface="Calibri" pitchFamily="34" charset="0"/>
-                <a:ea typeface="Calibri" pitchFamily="34" charset="-122"/>
-                <a:cs typeface="Calibri" pitchFamily="34" charset="-120"/>
-              </a:rPr>
-              <a:t>WEAK DISTRACTOR</a:t>
-            </a:r>
-            <a:endParaRPr lang="en-US" sz="900" dirty="0"/>
-          </a:p>
-        </p:txBody>
-      </p:sp>
-      <p:sp>
-        <p:nvSpPr>
-          <p:cNvPr id="29" name="Text 27"/>
-          <p:cNvSpPr/>
-          <p:nvPr/>
-        </p:nvSpPr>
-        <p:spPr>
-          <a:xfrm>
-            <a:off x="7040880" y="5413248"/>
-            <a:ext cx="4297680" cy="457200"/>
-          </a:xfrm>
-          <a:prstGeom prst="rect">
-            <a:avLst/>
-          </a:prstGeom>
-          <a:noFill/>
-          <a:ln/>
-        </p:spPr>
-        <p:txBody>
-          <a:bodyPr wrap="square" lIns="0" tIns="0" rIns="0" bIns="0" rtlCol="0" anchor="t"/>
-          <a:lstStyle/>
-          <a:p>
-            <a:pPr marL="0" indent="0" algn="l">
-              <a:buNone/>
-            </a:pPr>
-            <a:r>
               <a:rPr lang="en-US" sz="1000" i="1" dirty="0">
                 <a:solidFill>
                   <a:srgbClr val="475569"/>
@@ -4088,7 +3912,7 @@
                 <a:ea typeface="Calibri" pitchFamily="34" charset="-122"/>
                 <a:cs typeface="Calibri" pitchFamily="34" charset="-120"/>
               </a:rPr>
-              <a:t>Easily eliminated, instruction vs data is basic</a:t>
+              <a:t>Eliminates concurrency entirely; defeats the purpose</a:t>
             </a:r>
             <a:endParaRPr lang="en-US" sz="1000" dirty="0"/>
           </a:p>
@@ -4096,7 +3920,7 @@
       </p:sp>
       <p:sp>
         <p:nvSpPr>
-          <p:cNvPr id="30" name="Shape 28"/>
+          <p:cNvPr id="26" name="Footer Line"/>
           <p:cNvSpPr/>
           <p:nvPr/>
         </p:nvSpPr>
@@ -4126,7 +3950,7 @@
       </p:sp>
       <p:sp>
         <p:nvSpPr>
-          <p:cNvPr id="31" name="Text 29"/>
+          <p:cNvPr id="27" name="Footer Text"/>
           <p:cNvSpPr/>
           <p:nvPr/>
         </p:nvSpPr>
@@ -4165,7 +3989,7 @@
       </p:sp>
       <p:sp>
         <p:nvSpPr>
-          <p:cNvPr id="32" name="Text 30"/>
+          <p:cNvPr id="28" name="Page Number"/>
           <p:cNvSpPr/>
           <p:nvPr/>
         </p:nvSpPr>
@@ -4321,7 +4145,7 @@
         </p:nvSpPr>
         <p:spPr>
           <a:xfrm>
-            <a:off x="685800" y="1783080"/>
+            <a:off x="685799" y="1460754"/>
             <a:ext cx="10820095" cy="548640"/>
           </a:xfrm>
           <a:prstGeom prst="rect">
@@ -4349,732 +4173,6 @@
               <a:t>As taxonomic complexity increased, item quality decreased.</a:t>
             </a:r>
             <a:endParaRPr lang="en-US" sz="2200" dirty="0"/>
-          </a:p>
-        </p:txBody>
-      </p:sp>
-      <p:sp>
-        <p:nvSpPr>
-          <p:cNvPr id="5" name="Text 3"/>
-          <p:cNvSpPr/>
-          <p:nvPr/>
-        </p:nvSpPr>
-        <p:spPr>
-          <a:xfrm>
-            <a:off x="685800" y="2377440"/>
-            <a:ext cx="7315200" cy="274320"/>
-          </a:xfrm>
-          <a:prstGeom prst="rect">
-            <a:avLst/>
-          </a:prstGeom>
-          <a:noFill/>
-          <a:ln/>
-        </p:spPr>
-        <p:txBody>
-          <a:bodyPr wrap="square" lIns="0" tIns="0" rIns="0" bIns="0" rtlCol="0" anchor="ctr"/>
-          <a:lstStyle/>
-          <a:p>
-            <a:pPr marL="0" indent="0" algn="l">
-              <a:buNone/>
-            </a:pPr>
-            <a:r>
-              <a:rPr lang="en-US" sz="1000" b="1" kern="0" spc="200" dirty="0">
-                <a:solidFill>
-                  <a:srgbClr val="94A3B8"/>
-                </a:solidFill>
-                <a:latin typeface="Calibri" pitchFamily="34" charset="0"/>
-                <a:ea typeface="Calibri" pitchFamily="34" charset="-122"/>
-                <a:cs typeface="Calibri" pitchFamily="34" charset="-120"/>
-              </a:rPr>
-              <a:t>Relative item quality (qualitative assessment)</a:t>
-            </a:r>
-            <a:endParaRPr lang="en-US" sz="1000" dirty="0"/>
-          </a:p>
-        </p:txBody>
-      </p:sp>
-      <p:sp>
-        <p:nvSpPr>
-          <p:cNvPr id="6" name="Text 4"/>
-          <p:cNvSpPr/>
-          <p:nvPr/>
-        </p:nvSpPr>
-        <p:spPr>
-          <a:xfrm>
-            <a:off x="685800" y="2743200"/>
-            <a:ext cx="2194560" cy="502920"/>
-          </a:xfrm>
-          <a:prstGeom prst="rect">
-            <a:avLst/>
-          </a:prstGeom>
-          <a:noFill/>
-          <a:ln/>
-        </p:spPr>
-        <p:txBody>
-          <a:bodyPr wrap="square" lIns="0" tIns="0" rIns="0" bIns="0" rtlCol="0" anchor="ctr"/>
-          <a:lstStyle/>
-          <a:p>
-            <a:pPr marL="0" indent="0" algn="l">
-              <a:buNone/>
-            </a:pPr>
-            <a:r>
-              <a:rPr lang="en-US" sz="1200" b="1" dirty="0">
-                <a:solidFill>
-                  <a:srgbClr val="0F172A"/>
-                </a:solidFill>
-                <a:latin typeface="Calibri" pitchFamily="34" charset="0"/>
-                <a:ea typeface="Calibri" pitchFamily="34" charset="-122"/>
-                <a:cs typeface="Calibri" pitchFamily="34" charset="-120"/>
-              </a:rPr>
-              <a:t>Unistructural</a:t>
-            </a:r>
-            <a:endParaRPr lang="en-US" sz="1200" dirty="0"/>
-          </a:p>
-        </p:txBody>
-      </p:sp>
-      <p:sp>
-        <p:nvSpPr>
-          <p:cNvPr id="7" name="Shape 5"/>
-          <p:cNvSpPr/>
-          <p:nvPr/>
-        </p:nvSpPr>
-        <p:spPr>
-          <a:xfrm>
-            <a:off x="2880360" y="2834640"/>
-            <a:ext cx="6400800" cy="320040"/>
-          </a:xfrm>
-          <a:prstGeom prst="rect">
-            <a:avLst/>
-          </a:prstGeom>
-          <a:solidFill>
-            <a:srgbClr val="EEF2F7"/>
-          </a:solidFill>
-          <a:ln/>
-        </p:spPr>
-        <p:txBody>
-          <a:bodyPr/>
-          <a:lstStyle/>
-          <a:p>
-            <a:endParaRPr lang="en-US"/>
-          </a:p>
-        </p:txBody>
-      </p:sp>
-      <p:sp>
-        <p:nvSpPr>
-          <p:cNvPr id="8" name="Shape 6"/>
-          <p:cNvSpPr/>
-          <p:nvPr/>
-        </p:nvSpPr>
-        <p:spPr>
-          <a:xfrm>
-            <a:off x="2880360" y="2834640"/>
-            <a:ext cx="5888736" cy="320040"/>
-          </a:xfrm>
-          <a:prstGeom prst="rect">
-            <a:avLst/>
-          </a:prstGeom>
-          <a:solidFill>
-            <a:srgbClr val="10897A"/>
-          </a:solidFill>
-          <a:ln/>
-        </p:spPr>
-        <p:txBody>
-          <a:bodyPr/>
-          <a:lstStyle/>
-          <a:p>
-            <a:endParaRPr lang="en-US"/>
-          </a:p>
-        </p:txBody>
-      </p:sp>
-      <p:sp>
-        <p:nvSpPr>
-          <p:cNvPr id="9" name="Text 7"/>
-          <p:cNvSpPr/>
-          <p:nvPr/>
-        </p:nvSpPr>
-        <p:spPr>
-          <a:xfrm>
-            <a:off x="685800" y="3383280"/>
-            <a:ext cx="2194560" cy="502920"/>
-          </a:xfrm>
-          <a:prstGeom prst="rect">
-            <a:avLst/>
-          </a:prstGeom>
-          <a:noFill/>
-          <a:ln/>
-        </p:spPr>
-        <p:txBody>
-          <a:bodyPr wrap="square" lIns="0" tIns="0" rIns="0" bIns="0" rtlCol="0" anchor="ctr"/>
-          <a:lstStyle/>
-          <a:p>
-            <a:pPr marL="0" indent="0" algn="l">
-              <a:buNone/>
-            </a:pPr>
-            <a:r>
-              <a:rPr lang="en-US" sz="1200" b="1" dirty="0">
-                <a:solidFill>
-                  <a:srgbClr val="0F172A"/>
-                </a:solidFill>
-                <a:latin typeface="Calibri" pitchFamily="34" charset="0"/>
-                <a:ea typeface="Calibri" pitchFamily="34" charset="-122"/>
-                <a:cs typeface="Calibri" pitchFamily="34" charset="-120"/>
-              </a:rPr>
-              <a:t>Multistructural</a:t>
-            </a:r>
-            <a:endParaRPr lang="en-US" sz="1200" dirty="0"/>
-          </a:p>
-        </p:txBody>
-      </p:sp>
-      <p:sp>
-        <p:nvSpPr>
-          <p:cNvPr id="10" name="Shape 8"/>
-          <p:cNvSpPr/>
-          <p:nvPr/>
-        </p:nvSpPr>
-        <p:spPr>
-          <a:xfrm>
-            <a:off x="2880360" y="3474720"/>
-            <a:ext cx="6400800" cy="320040"/>
-          </a:xfrm>
-          <a:prstGeom prst="rect">
-            <a:avLst/>
-          </a:prstGeom>
-          <a:solidFill>
-            <a:srgbClr val="EEF2F7"/>
-          </a:solidFill>
-          <a:ln/>
-        </p:spPr>
-        <p:txBody>
-          <a:bodyPr/>
-          <a:lstStyle/>
-          <a:p>
-            <a:endParaRPr lang="en-US"/>
-          </a:p>
-        </p:txBody>
-      </p:sp>
-      <p:sp>
-        <p:nvSpPr>
-          <p:cNvPr id="11" name="Shape 9"/>
-          <p:cNvSpPr/>
-          <p:nvPr/>
-        </p:nvSpPr>
-        <p:spPr>
-          <a:xfrm>
-            <a:off x="2880360" y="3474720"/>
-            <a:ext cx="4992624" cy="320040"/>
-          </a:xfrm>
-          <a:prstGeom prst="rect">
-            <a:avLst/>
-          </a:prstGeom>
-          <a:solidFill>
-            <a:srgbClr val="1C7293"/>
-          </a:solidFill>
-          <a:ln/>
-        </p:spPr>
-        <p:txBody>
-          <a:bodyPr/>
-          <a:lstStyle/>
-          <a:p>
-            <a:endParaRPr lang="en-US"/>
-          </a:p>
-        </p:txBody>
-      </p:sp>
-      <p:sp>
-        <p:nvSpPr>
-          <p:cNvPr id="12" name="Text 10"/>
-          <p:cNvSpPr/>
-          <p:nvPr/>
-        </p:nvSpPr>
-        <p:spPr>
-          <a:xfrm>
-            <a:off x="685800" y="4023360"/>
-            <a:ext cx="2194560" cy="502920"/>
-          </a:xfrm>
-          <a:prstGeom prst="rect">
-            <a:avLst/>
-          </a:prstGeom>
-          <a:noFill/>
-          <a:ln/>
-        </p:spPr>
-        <p:txBody>
-          <a:bodyPr wrap="square" lIns="0" tIns="0" rIns="0" bIns="0" rtlCol="0" anchor="ctr"/>
-          <a:lstStyle/>
-          <a:p>
-            <a:pPr marL="0" indent="0" algn="l">
-              <a:buNone/>
-            </a:pPr>
-            <a:r>
-              <a:rPr lang="en-US" sz="1200" b="1" dirty="0">
-                <a:solidFill>
-                  <a:srgbClr val="0F172A"/>
-                </a:solidFill>
-                <a:latin typeface="Calibri" pitchFamily="34" charset="0"/>
-                <a:ea typeface="Calibri" pitchFamily="34" charset="-122"/>
-                <a:cs typeface="Calibri" pitchFamily="34" charset="-120"/>
-              </a:rPr>
-              <a:t>Relational</a:t>
-            </a:r>
-            <a:endParaRPr lang="en-US" sz="1200" dirty="0"/>
-          </a:p>
-        </p:txBody>
-      </p:sp>
-      <p:sp>
-        <p:nvSpPr>
-          <p:cNvPr id="13" name="Shape 11"/>
-          <p:cNvSpPr/>
-          <p:nvPr/>
-        </p:nvSpPr>
-        <p:spPr>
-          <a:xfrm>
-            <a:off x="2880360" y="4114800"/>
-            <a:ext cx="6400800" cy="320040"/>
-          </a:xfrm>
-          <a:prstGeom prst="rect">
-            <a:avLst/>
-          </a:prstGeom>
-          <a:solidFill>
-            <a:srgbClr val="EEF2F7"/>
-          </a:solidFill>
-          <a:ln/>
-        </p:spPr>
-        <p:txBody>
-          <a:bodyPr/>
-          <a:lstStyle/>
-          <a:p>
-            <a:endParaRPr lang="en-US"/>
-          </a:p>
-        </p:txBody>
-      </p:sp>
-      <p:sp>
-        <p:nvSpPr>
-          <p:cNvPr id="14" name="Shape 12"/>
-          <p:cNvSpPr/>
-          <p:nvPr/>
-        </p:nvSpPr>
-        <p:spPr>
-          <a:xfrm>
-            <a:off x="2880360" y="4114800"/>
-            <a:ext cx="3520440" cy="320040"/>
-          </a:xfrm>
-          <a:prstGeom prst="rect">
-            <a:avLst/>
-          </a:prstGeom>
-          <a:solidFill>
-            <a:srgbClr val="E07A3E"/>
-          </a:solidFill>
-          <a:ln/>
-        </p:spPr>
-        <p:txBody>
-          <a:bodyPr/>
-          <a:lstStyle/>
-          <a:p>
-            <a:endParaRPr lang="en-US"/>
-          </a:p>
-        </p:txBody>
-      </p:sp>
-      <p:sp>
-        <p:nvSpPr>
-          <p:cNvPr id="15" name="Text 13"/>
-          <p:cNvSpPr/>
-          <p:nvPr/>
-        </p:nvSpPr>
-        <p:spPr>
-          <a:xfrm>
-            <a:off x="685800" y="4663440"/>
-            <a:ext cx="2194560" cy="502920"/>
-          </a:xfrm>
-          <a:prstGeom prst="rect">
-            <a:avLst/>
-          </a:prstGeom>
-          <a:noFill/>
-          <a:ln/>
-        </p:spPr>
-        <p:txBody>
-          <a:bodyPr wrap="square" lIns="0" tIns="0" rIns="0" bIns="0" rtlCol="0" anchor="ctr"/>
-          <a:lstStyle/>
-          <a:p>
-            <a:pPr marL="0" indent="0" algn="l">
-              <a:buNone/>
-            </a:pPr>
-            <a:r>
-              <a:rPr lang="en-US" sz="1200" b="1" dirty="0">
-                <a:solidFill>
-                  <a:srgbClr val="0F172A"/>
-                </a:solidFill>
-                <a:latin typeface="Calibri" pitchFamily="34" charset="0"/>
-                <a:ea typeface="Calibri" pitchFamily="34" charset="-122"/>
-                <a:cs typeface="Calibri" pitchFamily="34" charset="-120"/>
-              </a:rPr>
-              <a:t>Extended Abstract</a:t>
-            </a:r>
-            <a:endParaRPr lang="en-US" sz="1200" dirty="0"/>
-          </a:p>
-        </p:txBody>
-      </p:sp>
-      <p:sp>
-        <p:nvSpPr>
-          <p:cNvPr id="16" name="Shape 14"/>
-          <p:cNvSpPr/>
-          <p:nvPr/>
-        </p:nvSpPr>
-        <p:spPr>
-          <a:xfrm>
-            <a:off x="2880360" y="4754880"/>
-            <a:ext cx="6400800" cy="320040"/>
-          </a:xfrm>
-          <a:prstGeom prst="rect">
-            <a:avLst/>
-          </a:prstGeom>
-          <a:solidFill>
-            <a:srgbClr val="EEF2F7"/>
-          </a:solidFill>
-          <a:ln/>
-        </p:spPr>
-        <p:txBody>
-          <a:bodyPr/>
-          <a:lstStyle/>
-          <a:p>
-            <a:endParaRPr lang="en-US"/>
-          </a:p>
-        </p:txBody>
-      </p:sp>
-      <p:sp>
-        <p:nvSpPr>
-          <p:cNvPr id="17" name="Shape 15"/>
-          <p:cNvSpPr/>
-          <p:nvPr/>
-        </p:nvSpPr>
-        <p:spPr>
-          <a:xfrm>
-            <a:off x="2880360" y="4754880"/>
-            <a:ext cx="2560320" cy="320040"/>
-          </a:xfrm>
-          <a:prstGeom prst="rect">
-            <a:avLst/>
-          </a:prstGeom>
-          <a:solidFill>
-            <a:srgbClr val="C2410C"/>
-          </a:solidFill>
-          <a:ln/>
-        </p:spPr>
-        <p:txBody>
-          <a:bodyPr/>
-          <a:lstStyle/>
-          <a:p>
-            <a:endParaRPr lang="en-US"/>
-          </a:p>
-        </p:txBody>
-      </p:sp>
-      <p:sp>
-        <p:nvSpPr>
-          <p:cNvPr id="18" name="Shape 16"/>
-          <p:cNvSpPr/>
-          <p:nvPr/>
-        </p:nvSpPr>
-        <p:spPr>
-          <a:xfrm>
-            <a:off x="9738360" y="2560320"/>
-            <a:ext cx="164592" cy="164592"/>
-          </a:xfrm>
-          <a:prstGeom prst="ellipse">
-            <a:avLst/>
-          </a:prstGeom>
-          <a:solidFill>
-            <a:srgbClr val="E07A3E"/>
-          </a:solidFill>
-          <a:ln/>
-        </p:spPr>
-        <p:txBody>
-          <a:bodyPr/>
-          <a:lstStyle/>
-          <a:p>
-            <a:endParaRPr lang="en-US"/>
-          </a:p>
-        </p:txBody>
-      </p:sp>
-      <p:sp>
-        <p:nvSpPr>
-          <p:cNvPr id="19" name="Text 17"/>
-          <p:cNvSpPr/>
-          <p:nvPr/>
-        </p:nvSpPr>
-        <p:spPr>
-          <a:xfrm>
-            <a:off x="10030968" y="2468880"/>
-            <a:ext cx="1474927" cy="320040"/>
-          </a:xfrm>
-          <a:prstGeom prst="rect">
-            <a:avLst/>
-          </a:prstGeom>
-          <a:noFill/>
-          <a:ln/>
-        </p:spPr>
-        <p:txBody>
-          <a:bodyPr wrap="square" lIns="0" tIns="0" rIns="0" bIns="0" rtlCol="0" anchor="ctr"/>
-          <a:lstStyle/>
-          <a:p>
-            <a:pPr marL="0" indent="0" algn="l">
-              <a:buNone/>
-            </a:pPr>
-            <a:r>
-              <a:rPr lang="en-US" sz="1300" b="1" dirty="0">
-                <a:solidFill>
-                  <a:srgbClr val="0A2540"/>
-                </a:solidFill>
-                <a:latin typeface="Calibri" pitchFamily="34" charset="0"/>
-                <a:ea typeface="Calibri" pitchFamily="34" charset="-122"/>
-                <a:cs typeface="Calibri" pitchFamily="34" charset="-120"/>
-              </a:rPr>
-              <a:t>Lower levels excelled</a:t>
-            </a:r>
-            <a:endParaRPr lang="en-US" sz="1300" dirty="0"/>
-          </a:p>
-        </p:txBody>
-      </p:sp>
-      <p:sp>
-        <p:nvSpPr>
-          <p:cNvPr id="20" name="Text 18"/>
-          <p:cNvSpPr/>
-          <p:nvPr/>
-        </p:nvSpPr>
-        <p:spPr>
-          <a:xfrm>
-            <a:off x="10030968" y="2798064"/>
-            <a:ext cx="1474927" cy="914400"/>
-          </a:xfrm>
-          <a:prstGeom prst="rect">
-            <a:avLst/>
-          </a:prstGeom>
-          <a:noFill/>
-          <a:ln/>
-        </p:spPr>
-        <p:txBody>
-          <a:bodyPr wrap="square" lIns="0" tIns="0" rIns="0" bIns="0" rtlCol="0" anchor="t"/>
-          <a:lstStyle/>
-          <a:p>
-            <a:pPr marL="0" indent="0" algn="l">
-              <a:buNone/>
-            </a:pPr>
-            <a:r>
-              <a:rPr lang="en-US" sz="1000" dirty="0">
-                <a:solidFill>
-                  <a:srgbClr val="475569"/>
-                </a:solidFill>
-                <a:latin typeface="Calibri" pitchFamily="34" charset="0"/>
-                <a:ea typeface="Calibri" pitchFamily="34" charset="-122"/>
-                <a:cs typeface="Calibri" pitchFamily="34" charset="-120"/>
-              </a:rPr>
-              <a:t>Unistructural and multistructural items aligned with intent and had plausible distractors.</a:t>
-            </a:r>
-            <a:endParaRPr lang="en-US" sz="1000" dirty="0"/>
-          </a:p>
-        </p:txBody>
-      </p:sp>
-      <p:sp>
-        <p:nvSpPr>
-          <p:cNvPr id="21" name="Shape 19"/>
-          <p:cNvSpPr/>
-          <p:nvPr/>
-        </p:nvSpPr>
-        <p:spPr>
-          <a:xfrm>
-            <a:off x="9738360" y="3794760"/>
-            <a:ext cx="164592" cy="164592"/>
-          </a:xfrm>
-          <a:prstGeom prst="ellipse">
-            <a:avLst/>
-          </a:prstGeom>
-          <a:solidFill>
-            <a:srgbClr val="E07A3E"/>
-          </a:solidFill>
-          <a:ln/>
-        </p:spPr>
-        <p:txBody>
-          <a:bodyPr/>
-          <a:lstStyle/>
-          <a:p>
-            <a:endParaRPr lang="en-US"/>
-          </a:p>
-        </p:txBody>
-      </p:sp>
-      <p:sp>
-        <p:nvSpPr>
-          <p:cNvPr id="22" name="Text 20"/>
-          <p:cNvSpPr/>
-          <p:nvPr/>
-        </p:nvSpPr>
-        <p:spPr>
-          <a:xfrm>
-            <a:off x="10030968" y="3703320"/>
-            <a:ext cx="1474927" cy="320040"/>
-          </a:xfrm>
-          <a:prstGeom prst="rect">
-            <a:avLst/>
-          </a:prstGeom>
-          <a:noFill/>
-          <a:ln/>
-        </p:spPr>
-        <p:txBody>
-          <a:bodyPr wrap="square" lIns="0" tIns="0" rIns="0" bIns="0" rtlCol="0" anchor="ctr"/>
-          <a:lstStyle/>
-          <a:p>
-            <a:pPr marL="0" indent="0" algn="l">
-              <a:buNone/>
-            </a:pPr>
-            <a:r>
-              <a:rPr lang="en-US" sz="1300" b="1" dirty="0">
-                <a:solidFill>
-                  <a:srgbClr val="0A2540"/>
-                </a:solidFill>
-                <a:latin typeface="Calibri" pitchFamily="34" charset="0"/>
-                <a:ea typeface="Calibri" pitchFamily="34" charset="-122"/>
-                <a:cs typeface="Calibri" pitchFamily="34" charset="-120"/>
-              </a:rPr>
-              <a:t>Higher levels struggled</a:t>
-            </a:r>
-            <a:endParaRPr lang="en-US" sz="1300" dirty="0"/>
-          </a:p>
-        </p:txBody>
-      </p:sp>
-      <p:sp>
-        <p:nvSpPr>
-          <p:cNvPr id="23" name="Text 21"/>
-          <p:cNvSpPr/>
-          <p:nvPr/>
-        </p:nvSpPr>
-        <p:spPr>
-          <a:xfrm>
-            <a:off x="10030968" y="4087368"/>
-            <a:ext cx="1474927" cy="914400"/>
-          </a:xfrm>
-          <a:prstGeom prst="rect">
-            <a:avLst/>
-          </a:prstGeom>
-          <a:noFill/>
-          <a:ln/>
-        </p:spPr>
-        <p:txBody>
-          <a:bodyPr wrap="square" lIns="0" tIns="0" rIns="0" bIns="0" rtlCol="0" anchor="t"/>
-          <a:lstStyle/>
-          <a:p>
-            <a:pPr marL="0" indent="0" algn="l">
-              <a:buNone/>
-            </a:pPr>
-            <a:r>
-              <a:rPr lang="en-US" sz="1000" dirty="0">
-                <a:solidFill>
-                  <a:srgbClr val="475569"/>
-                </a:solidFill>
-                <a:latin typeface="Calibri" pitchFamily="34" charset="0"/>
-                <a:ea typeface="Calibri" pitchFamily="34" charset="-122"/>
-                <a:cs typeface="Calibri" pitchFamily="34" charset="-120"/>
-              </a:rPr>
-              <a:t>Relational and extended abstract items showed validity concerns, sometimes oversimplified.</a:t>
-            </a:r>
-            <a:endParaRPr lang="en-US" sz="1000" dirty="0"/>
-          </a:p>
-        </p:txBody>
-      </p:sp>
-      <p:sp>
-        <p:nvSpPr>
-          <p:cNvPr id="24" name="Shape 22"/>
-          <p:cNvSpPr/>
-          <p:nvPr/>
-        </p:nvSpPr>
-        <p:spPr>
-          <a:xfrm>
-            <a:off x="9738360" y="5029200"/>
-            <a:ext cx="164592" cy="164592"/>
-          </a:xfrm>
-          <a:prstGeom prst="ellipse">
-            <a:avLst/>
-          </a:prstGeom>
-          <a:solidFill>
-            <a:srgbClr val="E07A3E"/>
-          </a:solidFill>
-          <a:ln/>
-        </p:spPr>
-        <p:txBody>
-          <a:bodyPr/>
-          <a:lstStyle/>
-          <a:p>
-            <a:endParaRPr lang="en-US"/>
-          </a:p>
-        </p:txBody>
-      </p:sp>
-      <p:sp>
-        <p:nvSpPr>
-          <p:cNvPr id="25" name="Text 23"/>
-          <p:cNvSpPr/>
-          <p:nvPr/>
-        </p:nvSpPr>
-        <p:spPr>
-          <a:xfrm>
-            <a:off x="10030968" y="4937760"/>
-            <a:ext cx="1474927" cy="320040"/>
-          </a:xfrm>
-          <a:prstGeom prst="rect">
-            <a:avLst/>
-          </a:prstGeom>
-          <a:noFill/>
-          <a:ln/>
-        </p:spPr>
-        <p:txBody>
-          <a:bodyPr wrap="square" lIns="0" tIns="0" rIns="0" bIns="0" rtlCol="0" anchor="ctr"/>
-          <a:lstStyle/>
-          <a:p>
-            <a:pPr marL="0" indent="0" algn="l">
-              <a:buNone/>
-            </a:pPr>
-            <a:r>
-              <a:rPr lang="en-US" sz="1300" b="1" dirty="0">
-                <a:solidFill>
-                  <a:srgbClr val="0A2540"/>
-                </a:solidFill>
-                <a:latin typeface="Calibri" pitchFamily="34" charset="0"/>
-                <a:ea typeface="Calibri" pitchFamily="34" charset="-122"/>
-                <a:cs typeface="Calibri" pitchFamily="34" charset="-120"/>
-              </a:rPr>
-              <a:t>Distractor redundancy</a:t>
-            </a:r>
-            <a:endParaRPr lang="en-US" sz="1300" dirty="0"/>
-          </a:p>
-        </p:txBody>
-      </p:sp>
-      <p:sp>
-        <p:nvSpPr>
-          <p:cNvPr id="26" name="Text 24"/>
-          <p:cNvSpPr/>
-          <p:nvPr/>
-        </p:nvSpPr>
-        <p:spPr>
-          <a:xfrm>
-            <a:off x="10030968" y="5349240"/>
-            <a:ext cx="1474927" cy="914400"/>
-          </a:xfrm>
-          <a:prstGeom prst="rect">
-            <a:avLst/>
-          </a:prstGeom>
-          <a:noFill/>
-          <a:ln/>
-        </p:spPr>
-        <p:txBody>
-          <a:bodyPr wrap="square" lIns="0" tIns="0" rIns="0" bIns="0" rtlCol="0" anchor="t"/>
-          <a:lstStyle/>
-          <a:p>
-            <a:pPr marL="0" indent="0" algn="l">
-              <a:buNone/>
-            </a:pPr>
-            <a:r>
-              <a:rPr lang="en-US" sz="1000" dirty="0">
-                <a:solidFill>
-                  <a:srgbClr val="475569"/>
-                </a:solidFill>
-                <a:latin typeface="Calibri" pitchFamily="34" charset="0"/>
-                <a:ea typeface="Calibri" pitchFamily="34" charset="-122"/>
-                <a:cs typeface="Calibri" pitchFamily="34" charset="-120"/>
-              </a:rPr>
-              <a:t>Multiple options occasionally conveyed the same incorrect concept.</a:t>
-            </a:r>
-            <a:endParaRPr lang="en-US" sz="1000" dirty="0"/>
           </a:p>
         </p:txBody>
       </p:sp>
@@ -5183,6 +4281,498 @@
               <a:t>12 / 14</a:t>
             </a:r>
             <a:endParaRPr lang="en-US" sz="900" dirty="0"/>
+          </a:p>
+        </p:txBody>
+      </p:sp>
+      <p:sp>
+        <p:nvSpPr>
+          <p:cNvPr id="30" name="Shape 16">
+            <a:extLst>
+              <a:ext uri="{FF2B5EF4-FFF2-40B4-BE49-F238E27FC236}">
+                <a16:creationId xmlns:a16="http://schemas.microsoft.com/office/drawing/2014/main" id="{8B7CEF0D-2610-43A4-A4DF-994357F2DA46}"/>
+              </a:ext>
+            </a:extLst>
+          </p:cNvPr>
+          <p:cNvSpPr/>
+          <p:nvPr/>
+        </p:nvSpPr>
+        <p:spPr>
+          <a:xfrm>
+            <a:off x="685800" y="2491740"/>
+            <a:ext cx="164592" cy="164592"/>
+          </a:xfrm>
+          <a:prstGeom prst="ellipse">
+            <a:avLst/>
+          </a:prstGeom>
+          <a:solidFill>
+            <a:srgbClr val="E07A3E"/>
+          </a:solidFill>
+          <a:ln/>
+        </p:spPr>
+        <p:txBody>
+          <a:bodyPr/>
+          <a:lstStyle/>
+          <a:p>
+            <a:endParaRPr lang="en-US"/>
+          </a:p>
+        </p:txBody>
+      </p:sp>
+      <p:sp>
+        <p:nvSpPr>
+          <p:cNvPr id="31" name="Text 17">
+            <a:extLst>
+              <a:ext uri="{FF2B5EF4-FFF2-40B4-BE49-F238E27FC236}">
+                <a16:creationId xmlns:a16="http://schemas.microsoft.com/office/drawing/2014/main" id="{A015C17A-0401-4C7D-81B2-E4F6B64FFAFF}"/>
+              </a:ext>
+            </a:extLst>
+          </p:cNvPr>
+          <p:cNvSpPr/>
+          <p:nvPr/>
+        </p:nvSpPr>
+        <p:spPr>
+          <a:xfrm>
+            <a:off x="978408" y="2400300"/>
+            <a:ext cx="2560659" cy="320040"/>
+          </a:xfrm>
+          <a:prstGeom prst="rect">
+            <a:avLst/>
+          </a:prstGeom>
+          <a:noFill/>
+          <a:ln/>
+        </p:spPr>
+        <p:txBody>
+          <a:bodyPr wrap="square" lIns="0" tIns="0" rIns="0" bIns="0" rtlCol="0" anchor="ctr"/>
+          <a:lstStyle/>
+          <a:p>
+            <a:pPr marL="0" indent="0" algn="l">
+              <a:buNone/>
+            </a:pPr>
+            <a:r>
+              <a:rPr lang="en-US" sz="2000" b="1" dirty="0">
+                <a:solidFill>
+                  <a:srgbClr val="0A2540"/>
+                </a:solidFill>
+                <a:latin typeface="Calibri" pitchFamily="34" charset="0"/>
+                <a:ea typeface="Calibri" pitchFamily="34" charset="-122"/>
+                <a:cs typeface="Calibri" pitchFamily="34" charset="-120"/>
+              </a:rPr>
+              <a:t>Lower levels excelled</a:t>
+            </a:r>
+            <a:endParaRPr lang="en-US" sz="2000" dirty="0"/>
+          </a:p>
+        </p:txBody>
+      </p:sp>
+      <p:sp>
+        <p:nvSpPr>
+          <p:cNvPr id="32" name="Text 18">
+            <a:extLst>
+              <a:ext uri="{FF2B5EF4-FFF2-40B4-BE49-F238E27FC236}">
+                <a16:creationId xmlns:a16="http://schemas.microsoft.com/office/drawing/2014/main" id="{5E40595B-E516-4DD3-B085-95790A22462F}"/>
+              </a:ext>
+            </a:extLst>
+          </p:cNvPr>
+          <p:cNvSpPr/>
+          <p:nvPr/>
+        </p:nvSpPr>
+        <p:spPr>
+          <a:xfrm>
+            <a:off x="978407" y="2729484"/>
+            <a:ext cx="4059259" cy="914400"/>
+          </a:xfrm>
+          <a:prstGeom prst="rect">
+            <a:avLst/>
+          </a:prstGeom>
+          <a:noFill/>
+          <a:ln/>
+        </p:spPr>
+        <p:txBody>
+          <a:bodyPr wrap="square" lIns="0" tIns="0" rIns="0" bIns="0" rtlCol="0" anchor="t"/>
+          <a:lstStyle/>
+          <a:p>
+            <a:pPr marL="0" indent="0" algn="l">
+              <a:buNone/>
+            </a:pPr>
+            <a:r>
+              <a:rPr lang="en-US" sz="1600" dirty="0">
+                <a:solidFill>
+                  <a:srgbClr val="475569"/>
+                </a:solidFill>
+                <a:latin typeface="Calibri" pitchFamily="34" charset="0"/>
+                <a:ea typeface="Calibri" pitchFamily="34" charset="-122"/>
+                <a:cs typeface="Calibri" pitchFamily="34" charset="-120"/>
+              </a:rPr>
+              <a:t>Unistructural and multistructural items aligned with intent and had plausible distractors.</a:t>
+            </a:r>
+            <a:endParaRPr lang="en-US" sz="1600" dirty="0"/>
+          </a:p>
+        </p:txBody>
+      </p:sp>
+      <p:sp>
+        <p:nvSpPr>
+          <p:cNvPr id="33" name="Shape 19">
+            <a:extLst>
+              <a:ext uri="{FF2B5EF4-FFF2-40B4-BE49-F238E27FC236}">
+                <a16:creationId xmlns:a16="http://schemas.microsoft.com/office/drawing/2014/main" id="{BE94647A-3959-4771-9A02-DFF7B2980F4B}"/>
+              </a:ext>
+            </a:extLst>
+          </p:cNvPr>
+          <p:cNvSpPr/>
+          <p:nvPr/>
+        </p:nvSpPr>
+        <p:spPr>
+          <a:xfrm>
+            <a:off x="685800" y="3916680"/>
+            <a:ext cx="164592" cy="164592"/>
+          </a:xfrm>
+          <a:prstGeom prst="ellipse">
+            <a:avLst/>
+          </a:prstGeom>
+          <a:solidFill>
+            <a:srgbClr val="E07A3E"/>
+          </a:solidFill>
+          <a:ln/>
+        </p:spPr>
+        <p:txBody>
+          <a:bodyPr/>
+          <a:lstStyle/>
+          <a:p>
+            <a:endParaRPr lang="en-US"/>
+          </a:p>
+        </p:txBody>
+      </p:sp>
+      <p:sp>
+        <p:nvSpPr>
+          <p:cNvPr id="34" name="Text 20">
+            <a:extLst>
+              <a:ext uri="{FF2B5EF4-FFF2-40B4-BE49-F238E27FC236}">
+                <a16:creationId xmlns:a16="http://schemas.microsoft.com/office/drawing/2014/main" id="{8AC3A09D-4276-4D83-85F3-4373C5865BB3}"/>
+              </a:ext>
+            </a:extLst>
+          </p:cNvPr>
+          <p:cNvSpPr/>
+          <p:nvPr/>
+        </p:nvSpPr>
+        <p:spPr>
+          <a:xfrm>
+            <a:off x="978408" y="3825240"/>
+            <a:ext cx="2416725" cy="320040"/>
+          </a:xfrm>
+          <a:prstGeom prst="rect">
+            <a:avLst/>
+          </a:prstGeom>
+          <a:noFill/>
+          <a:ln/>
+        </p:spPr>
+        <p:txBody>
+          <a:bodyPr wrap="square" lIns="0" tIns="0" rIns="0" bIns="0" rtlCol="0" anchor="ctr"/>
+          <a:lstStyle/>
+          <a:p>
+            <a:pPr marL="0" indent="0" algn="l">
+              <a:buNone/>
+            </a:pPr>
+            <a:r>
+              <a:rPr lang="en-US" sz="2000" b="1" dirty="0">
+                <a:solidFill>
+                  <a:srgbClr val="0A2540"/>
+                </a:solidFill>
+                <a:latin typeface="Calibri" pitchFamily="34" charset="0"/>
+                <a:ea typeface="Calibri" pitchFamily="34" charset="-122"/>
+                <a:cs typeface="Calibri" pitchFamily="34" charset="-120"/>
+              </a:rPr>
+              <a:t>Higher levels struggled</a:t>
+            </a:r>
+            <a:endParaRPr lang="en-US" sz="2000" dirty="0"/>
+          </a:p>
+        </p:txBody>
+      </p:sp>
+      <p:sp>
+        <p:nvSpPr>
+          <p:cNvPr id="35" name="Text 21">
+            <a:extLst>
+              <a:ext uri="{FF2B5EF4-FFF2-40B4-BE49-F238E27FC236}">
+                <a16:creationId xmlns:a16="http://schemas.microsoft.com/office/drawing/2014/main" id="{519EA1FA-F990-4BE7-B7F6-EC95E5035DC5}"/>
+              </a:ext>
+            </a:extLst>
+          </p:cNvPr>
+          <p:cNvSpPr/>
+          <p:nvPr/>
+        </p:nvSpPr>
+        <p:spPr>
+          <a:xfrm>
+            <a:off x="978408" y="4209288"/>
+            <a:ext cx="3559725" cy="914400"/>
+          </a:xfrm>
+          <a:prstGeom prst="rect">
+            <a:avLst/>
+          </a:prstGeom>
+          <a:noFill/>
+          <a:ln/>
+        </p:spPr>
+        <p:txBody>
+          <a:bodyPr wrap="square" lIns="0" tIns="0" rIns="0" bIns="0" rtlCol="0" anchor="t"/>
+          <a:lstStyle/>
+          <a:p>
+            <a:pPr marL="0" indent="0" algn="l">
+              <a:buNone/>
+            </a:pPr>
+            <a:r>
+              <a:rPr lang="en-US" sz="1600" dirty="0">
+                <a:solidFill>
+                  <a:srgbClr val="475569"/>
+                </a:solidFill>
+                <a:latin typeface="Calibri" pitchFamily="34" charset="0"/>
+                <a:ea typeface="Calibri" pitchFamily="34" charset="-122"/>
+                <a:cs typeface="Calibri" pitchFamily="34" charset="-120"/>
+              </a:rPr>
+              <a:t>Relational and extended abstract items showed validity concerns, sometimes oversimplified.</a:t>
+            </a:r>
+            <a:endParaRPr lang="en-US" sz="1600" dirty="0"/>
+          </a:p>
+        </p:txBody>
+      </p:sp>
+      <p:sp>
+        <p:nvSpPr>
+          <p:cNvPr id="36" name="Shape 22">
+            <a:extLst>
+              <a:ext uri="{FF2B5EF4-FFF2-40B4-BE49-F238E27FC236}">
+                <a16:creationId xmlns:a16="http://schemas.microsoft.com/office/drawing/2014/main" id="{C6E76959-D80C-4BCE-987E-1FC84A6EB1B6}"/>
+              </a:ext>
+            </a:extLst>
+          </p:cNvPr>
+          <p:cNvSpPr/>
+          <p:nvPr/>
+        </p:nvSpPr>
+        <p:spPr>
+          <a:xfrm>
+            <a:off x="6781800" y="2491740"/>
+            <a:ext cx="164592" cy="164592"/>
+          </a:xfrm>
+          <a:prstGeom prst="ellipse">
+            <a:avLst/>
+          </a:prstGeom>
+          <a:solidFill>
+            <a:srgbClr val="E07A3E"/>
+          </a:solidFill>
+          <a:ln/>
+        </p:spPr>
+        <p:txBody>
+          <a:bodyPr/>
+          <a:lstStyle/>
+          <a:p>
+            <a:endParaRPr lang="en-US"/>
+          </a:p>
+        </p:txBody>
+      </p:sp>
+      <p:sp>
+        <p:nvSpPr>
+          <p:cNvPr id="37" name="Text 23">
+            <a:extLst>
+              <a:ext uri="{FF2B5EF4-FFF2-40B4-BE49-F238E27FC236}">
+                <a16:creationId xmlns:a16="http://schemas.microsoft.com/office/drawing/2014/main" id="{4DBC038A-3319-49B6-A550-397C18F71671}"/>
+              </a:ext>
+            </a:extLst>
+          </p:cNvPr>
+          <p:cNvSpPr/>
+          <p:nvPr/>
+        </p:nvSpPr>
+        <p:spPr>
+          <a:xfrm>
+            <a:off x="7074408" y="2400300"/>
+            <a:ext cx="2662259" cy="320040"/>
+          </a:xfrm>
+          <a:prstGeom prst="rect">
+            <a:avLst/>
+          </a:prstGeom>
+          <a:noFill/>
+          <a:ln/>
+        </p:spPr>
+        <p:txBody>
+          <a:bodyPr wrap="square" lIns="0" tIns="0" rIns="0" bIns="0" rtlCol="0" anchor="ctr"/>
+          <a:lstStyle/>
+          <a:p>
+            <a:pPr marL="0" indent="0" algn="l">
+              <a:buNone/>
+            </a:pPr>
+            <a:r>
+              <a:rPr lang="en-US" sz="2000" b="1" dirty="0">
+                <a:solidFill>
+                  <a:srgbClr val="0A2540"/>
+                </a:solidFill>
+                <a:latin typeface="Calibri" pitchFamily="34" charset="0"/>
+                <a:ea typeface="Calibri" pitchFamily="34" charset="-122"/>
+                <a:cs typeface="Calibri" pitchFamily="34" charset="-120"/>
+              </a:rPr>
+              <a:t>Distractor redundancy</a:t>
+            </a:r>
+            <a:endParaRPr lang="en-US" sz="2000" dirty="0"/>
+          </a:p>
+        </p:txBody>
+      </p:sp>
+      <p:sp>
+        <p:nvSpPr>
+          <p:cNvPr id="38" name="Text 24">
+            <a:extLst>
+              <a:ext uri="{FF2B5EF4-FFF2-40B4-BE49-F238E27FC236}">
+                <a16:creationId xmlns:a16="http://schemas.microsoft.com/office/drawing/2014/main" id="{9B4CC60B-F7A3-47A1-AF86-23FA29EC7AC0}"/>
+              </a:ext>
+            </a:extLst>
+          </p:cNvPr>
+          <p:cNvSpPr/>
+          <p:nvPr/>
+        </p:nvSpPr>
+        <p:spPr>
+          <a:xfrm>
+            <a:off x="7074408" y="2799842"/>
+            <a:ext cx="3424259" cy="914400"/>
+          </a:xfrm>
+          <a:prstGeom prst="rect">
+            <a:avLst/>
+          </a:prstGeom>
+          <a:noFill/>
+          <a:ln/>
+        </p:spPr>
+        <p:txBody>
+          <a:bodyPr wrap="square" lIns="0" tIns="0" rIns="0" bIns="0" rtlCol="0" anchor="t"/>
+          <a:lstStyle/>
+          <a:p>
+            <a:pPr marL="0" indent="0" algn="l">
+              <a:buNone/>
+            </a:pPr>
+            <a:r>
+              <a:rPr lang="en-US" sz="1600" dirty="0">
+                <a:solidFill>
+                  <a:srgbClr val="475569"/>
+                </a:solidFill>
+                <a:latin typeface="Calibri" pitchFamily="34" charset="0"/>
+                <a:ea typeface="Calibri" pitchFamily="34" charset="-122"/>
+                <a:cs typeface="Calibri" pitchFamily="34" charset="-120"/>
+              </a:rPr>
+              <a:t>Multiple options occasionally conveyed the same incorrect concept.</a:t>
+            </a:r>
+            <a:endParaRPr lang="en-US" sz="1600" dirty="0"/>
+          </a:p>
+        </p:txBody>
+      </p:sp>
+      <p:sp>
+        <p:nvSpPr>
+          <p:cNvPr id="17" name="Shape 19">
+            <a:extLst>
+              <a:ext uri="{FF2B5EF4-FFF2-40B4-BE49-F238E27FC236}">
+                <a16:creationId xmlns:a16="http://schemas.microsoft.com/office/drawing/2014/main" id="{32AA650C-13A7-44B9-A01C-0B845D59801C}"/>
+              </a:ext>
+            </a:extLst>
+          </p:cNvPr>
+          <p:cNvSpPr/>
+          <p:nvPr/>
+        </p:nvSpPr>
+        <p:spPr>
+          <a:xfrm>
+            <a:off x="6781800" y="3916680"/>
+            <a:ext cx="164592" cy="164592"/>
+          </a:xfrm>
+          <a:prstGeom prst="ellipse">
+            <a:avLst/>
+          </a:prstGeom>
+          <a:solidFill>
+            <a:srgbClr val="E07A3E"/>
+          </a:solidFill>
+          <a:ln/>
+        </p:spPr>
+        <p:txBody>
+          <a:bodyPr/>
+          <a:lstStyle/>
+          <a:p>
+            <a:endParaRPr lang="en-US"/>
+          </a:p>
+        </p:txBody>
+      </p:sp>
+      <p:sp>
+        <p:nvSpPr>
+          <p:cNvPr id="18" name="Text 20">
+            <a:extLst>
+              <a:ext uri="{FF2B5EF4-FFF2-40B4-BE49-F238E27FC236}">
+                <a16:creationId xmlns:a16="http://schemas.microsoft.com/office/drawing/2014/main" id="{7143850D-082D-42ED-99C0-3AFE993190EA}"/>
+              </a:ext>
+            </a:extLst>
+          </p:cNvPr>
+          <p:cNvSpPr/>
+          <p:nvPr/>
+        </p:nvSpPr>
+        <p:spPr>
+          <a:xfrm>
+            <a:off x="7074408" y="3825240"/>
+            <a:ext cx="3949192" cy="320040"/>
+          </a:xfrm>
+          <a:prstGeom prst="rect">
+            <a:avLst/>
+          </a:prstGeom>
+          <a:noFill/>
+          <a:ln/>
+        </p:spPr>
+        <p:txBody>
+          <a:bodyPr wrap="square" lIns="0" tIns="0" rIns="0" bIns="0" rtlCol="0" anchor="ctr"/>
+          <a:lstStyle/>
+          <a:p>
+            <a:pPr marL="0" indent="0" algn="l">
+              <a:buNone/>
+            </a:pPr>
+            <a:r>
+              <a:rPr lang="en-US" sz="2000" b="1" dirty="0">
+                <a:solidFill>
+                  <a:srgbClr val="0A2540"/>
+                </a:solidFill>
+                <a:latin typeface="Calibri" pitchFamily="34" charset="0"/>
+                <a:ea typeface="Calibri" pitchFamily="34" charset="-122"/>
+                <a:cs typeface="Calibri" pitchFamily="34" charset="-120"/>
+              </a:rPr>
+              <a:t>Adhering to the course material</a:t>
+            </a:r>
+            <a:endParaRPr lang="en-US" sz="2000" dirty="0"/>
+          </a:p>
+        </p:txBody>
+      </p:sp>
+      <p:sp>
+        <p:nvSpPr>
+          <p:cNvPr id="19" name="Text 21">
+            <a:extLst>
+              <a:ext uri="{FF2B5EF4-FFF2-40B4-BE49-F238E27FC236}">
+                <a16:creationId xmlns:a16="http://schemas.microsoft.com/office/drawing/2014/main" id="{EC057219-F085-4867-8BEB-BD8137B0ADFB}"/>
+              </a:ext>
+            </a:extLst>
+          </p:cNvPr>
+          <p:cNvSpPr/>
+          <p:nvPr/>
+        </p:nvSpPr>
+        <p:spPr>
+          <a:xfrm>
+            <a:off x="7074408" y="4209288"/>
+            <a:ext cx="3559725" cy="1243330"/>
+          </a:xfrm>
+          <a:prstGeom prst="rect">
+            <a:avLst/>
+          </a:prstGeom>
+          <a:noFill/>
+          <a:ln/>
+        </p:spPr>
+        <p:txBody>
+          <a:bodyPr wrap="square" lIns="0" tIns="0" rIns="0" bIns="0" rtlCol="0" anchor="t"/>
+          <a:lstStyle/>
+          <a:p>
+            <a:pPr marL="0" indent="0" algn="l">
+              <a:buNone/>
+            </a:pPr>
+            <a:r>
+              <a:rPr lang="en-US" sz="1600" dirty="0">
+                <a:solidFill>
+                  <a:srgbClr val="475569"/>
+                </a:solidFill>
+                <a:latin typeface="Calibri" pitchFamily="34" charset="0"/>
+                <a:ea typeface="Calibri" pitchFamily="34" charset="-122"/>
+                <a:cs typeface="Calibri" pitchFamily="34" charset="-120"/>
+              </a:rPr>
+              <a:t>Sometimes, especially in the case of extended abstract questions, the questions would contain things that aren’t specifically mentioned in the course material</a:t>
+            </a:r>
+            <a:endParaRPr lang="en-US" sz="1600" dirty="0"/>
           </a:p>
         </p:txBody>
       </p:sp>
@@ -5283,7 +4873,7 @@
               <a:buNone/>
             </a:pPr>
             <a:r>
-              <a:rPr lang="en-US" sz="3200" b="1" dirty="0">
+              <a:rPr lang="en-US" sz="4400" b="1" dirty="0">
                 <a:solidFill>
                   <a:srgbClr val="0A2540"/>
                 </a:solidFill>
@@ -5291,9 +4881,9 @@
                 <a:ea typeface="Calibri" pitchFamily="34" charset="-122"/>
                 <a:cs typeface="Calibri" pitchFamily="34" charset="-120"/>
               </a:rPr>
-              <a:t>What We Learned &amp; What's Next</a:t>
-            </a:r>
-            <a:endParaRPr lang="en-US" sz="3200" dirty="0"/>
+              <a:t>Conclusion</a:t>
+            </a:r>
+            <a:endParaRPr lang="en-US" sz="4400" dirty="0"/>
           </a:p>
         </p:txBody>
       </p:sp>
@@ -5305,7 +4895,7 @@
         </p:nvSpPr>
         <p:spPr>
           <a:xfrm>
-            <a:off x="685800" y="1828800"/>
+            <a:off x="685800" y="1600200"/>
             <a:ext cx="5212080" cy="365760"/>
           </a:xfrm>
           <a:prstGeom prst="rect">
@@ -5322,7 +4912,7 @@
               <a:buNone/>
             </a:pPr>
             <a:r>
-              <a:rPr lang="en-US" sz="1600" b="1" dirty="0">
+              <a:rPr lang="en-US" sz="2400" b="1" dirty="0">
                 <a:solidFill>
                   <a:srgbClr val="0A2540"/>
                 </a:solidFill>
@@ -5332,7 +4922,7 @@
               </a:rPr>
               <a:t>Key takeaways</a:t>
             </a:r>
-            <a:endParaRPr lang="en-US" sz="1600" dirty="0"/>
+            <a:endParaRPr lang="en-US" sz="2400" dirty="0"/>
           </a:p>
         </p:txBody>
       </p:sp>
@@ -5427,7 +5017,7 @@
               <a:buNone/>
             </a:pPr>
             <a:r>
-              <a:rPr lang="en-US" sz="1200" dirty="0">
+              <a:rPr lang="en-US" dirty="0">
                 <a:solidFill>
                   <a:srgbClr val="0F172A"/>
                 </a:solidFill>
@@ -5437,7 +5027,7 @@
               </a:rPr>
               <a:t>An end-to-end pipeline that turns raw teaching materials into SOLO-classified assessments works in practice.</a:t>
             </a:r>
-            <a:endParaRPr lang="en-US" sz="1200" dirty="0"/>
+            <a:endParaRPr lang="en-US" dirty="0"/>
           </a:p>
         </p:txBody>
       </p:sp>
@@ -5532,7 +5122,7 @@
               <a:buNone/>
             </a:pPr>
             <a:r>
-              <a:rPr lang="en-US" sz="1200" dirty="0">
+              <a:rPr lang="en-US" dirty="0">
                 <a:solidFill>
                   <a:srgbClr val="0F172A"/>
                 </a:solidFill>
@@ -5542,7 +5132,7 @@
               </a:rPr>
               <a:t>Combining LLMs with ontology-driven structure gives the system a coherent knowledge layer.</a:t>
             </a:r>
-            <a:endParaRPr lang="en-US" sz="1200" dirty="0"/>
+            <a:endParaRPr lang="en-US" dirty="0"/>
           </a:p>
         </p:txBody>
       </p:sp>
@@ -5637,7 +5227,7 @@
               <a:buNone/>
             </a:pPr>
             <a:r>
-              <a:rPr lang="en-US" sz="1200" dirty="0">
+              <a:rPr lang="en-US" dirty="0">
                 <a:solidFill>
                   <a:srgbClr val="0F172A"/>
                 </a:solidFill>
@@ -5647,7 +5237,7 @@
               </a:rPr>
               <a:t>Lower-cognitive-level items are already production-ready; higher levels need refinement.</a:t>
             </a:r>
-            <a:endParaRPr lang="en-US" sz="1200" dirty="0"/>
+            <a:endParaRPr lang="en-US" dirty="0"/>
           </a:p>
         </p:txBody>
       </p:sp>
@@ -5792,7 +5382,7 @@
         <p:spPr>
           <a:xfrm>
             <a:off x="7223760" y="3154680"/>
-            <a:ext cx="3931920" cy="2651760"/>
+            <a:ext cx="3931920" cy="2788920"/>
           </a:xfrm>
           <a:prstGeom prst="rect">
             <a:avLst/>
@@ -5812,7 +5402,7 @@
               <a:buChar char="●"/>
             </a:pPr>
             <a:r>
-              <a:rPr lang="en-US" sz="1200" dirty="0">
+              <a:rPr lang="en-US" sz="1600" dirty="0">
                 <a:solidFill>
                   <a:srgbClr val="FFFFFF"/>
                 </a:solidFill>
@@ -5822,7 +5412,7 @@
               </a:rPr>
               <a:t>Comprehensive empirical evaluation of question quality across all SOLO levels</a:t>
             </a:r>
-            <a:endParaRPr lang="en-US" sz="1200" dirty="0"/>
+            <a:endParaRPr lang="en-US" sz="1600" dirty="0"/>
           </a:p>
           <a:p>
             <a:pPr marL="342900" indent="-342900" algn="l">
@@ -5833,7 +5423,7 @@
               <a:buChar char="●"/>
             </a:pPr>
             <a:r>
-              <a:rPr lang="en-US" sz="1200" dirty="0">
+              <a:rPr lang="en-US" sz="1600" dirty="0">
                 <a:solidFill>
                   <a:srgbClr val="FFFFFF"/>
                 </a:solidFill>
@@ -5843,7 +5433,7 @@
               </a:rPr>
               <a:t>Diagnose causes of quality drop at higher cognitive levels</a:t>
             </a:r>
-            <a:endParaRPr lang="en-US" sz="1200" dirty="0"/>
+            <a:endParaRPr lang="en-US" sz="1600" dirty="0"/>
           </a:p>
           <a:p>
             <a:pPr marL="342900" indent="-342900" algn="l">
@@ -5854,7 +5444,7 @@
               <a:buChar char="●"/>
             </a:pPr>
             <a:r>
-              <a:rPr lang="en-US" sz="1200" dirty="0">
+              <a:rPr lang="en-US" sz="1600" dirty="0">
                 <a:solidFill>
                   <a:srgbClr val="FFFFFF"/>
                 </a:solidFill>
@@ -5864,7 +5454,7 @@
               </a:rPr>
               <a:t>Refine distractor generation for richer pedagogical utility</a:t>
             </a:r>
-            <a:endParaRPr lang="en-US" sz="1200" dirty="0"/>
+            <a:endParaRPr lang="en-US" sz="1600" dirty="0"/>
           </a:p>
           <a:p>
             <a:pPr marL="342900" indent="-342900" algn="l">
@@ -5872,7 +5462,7 @@
               <a:buChar char="●"/>
             </a:pPr>
             <a:r>
-              <a:rPr lang="en-US" sz="1200" dirty="0">
+              <a:rPr lang="en-US" sz="1600" dirty="0">
                 <a:solidFill>
                   <a:srgbClr val="FFFFFF"/>
                 </a:solidFill>
@@ -5882,7 +5472,7 @@
               </a:rPr>
               <a:t>Extend beyond Multiple Choice Questions, short-answer and essay formats</a:t>
             </a:r>
-            <a:endParaRPr lang="en-US" sz="1200" dirty="0"/>
+            <a:endParaRPr lang="en-US" sz="1600" dirty="0"/>
           </a:p>
         </p:txBody>
       </p:sp>
@@ -7038,7 +6628,7 @@
               <a:buChar char="•"/>
             </a:pPr>
             <a:r>
-              <a:rPr lang="en-US" sz="1300" dirty="0"/>
+              <a:rPr lang="en-US" sz="1500" dirty="0"/>
               <a:t>Educators spend a lot of time writing assessments </a:t>
             </a:r>
           </a:p>
@@ -7051,14 +6641,14 @@
               <a:buChar char="•"/>
             </a:pPr>
             <a:r>
-              <a:rPr lang="en-US" sz="1300" dirty="0">
+              <a:rPr lang="en-US" sz="1500" dirty="0">
                 <a:latin typeface="Calibri" pitchFamily="34" charset="0"/>
                 <a:ea typeface="Calibri" pitchFamily="34" charset="-122"/>
                 <a:cs typeface="Calibri" pitchFamily="34" charset="-120"/>
               </a:rPr>
               <a:t>It is hard to cover varied cognitive levels</a:t>
             </a:r>
-            <a:endParaRPr lang="en-US" sz="1300" dirty="0"/>
+            <a:endParaRPr lang="en-US" sz="1500" dirty="0"/>
           </a:p>
           <a:p>
             <a:pPr marL="342900" indent="-342900" algn="l">
@@ -7066,14 +6656,14 @@
               <a:buChar char="•"/>
             </a:pPr>
             <a:r>
-              <a:rPr lang="en-US" sz="1300" dirty="0">
+              <a:rPr lang="en-US" sz="1500" dirty="0">
                 <a:latin typeface="Calibri" pitchFamily="34" charset="0"/>
                 <a:ea typeface="Calibri" pitchFamily="34" charset="-122"/>
                 <a:cs typeface="Calibri" pitchFamily="34" charset="-120"/>
               </a:rPr>
               <a:t>Quality drops under deadline pressure</a:t>
             </a:r>
-            <a:endParaRPr lang="en-US" sz="1300" dirty="0"/>
+            <a:endParaRPr lang="en-US" sz="1500" dirty="0"/>
           </a:p>
         </p:txBody>
       </p:sp>
@@ -7541,7 +7131,7 @@
               <a:buChar char="•"/>
             </a:pPr>
             <a:r>
-              <a:rPr lang="en-US" sz="1300" dirty="0">
+              <a:rPr lang="en-US" sz="1500" dirty="0">
                 <a:solidFill>
                   <a:srgbClr val="CBD5E1"/>
                 </a:solidFill>
@@ -7561,7 +7151,7 @@
               <a:buChar char="•"/>
             </a:pPr>
             <a:r>
-              <a:rPr lang="en-US" sz="1300" dirty="0">
+              <a:rPr lang="en-US" sz="1500" dirty="0">
                 <a:solidFill>
                   <a:srgbClr val="CBD5E1"/>
                 </a:solidFill>
@@ -7581,7 +7171,7 @@
               <a:buChar char="•"/>
             </a:pPr>
             <a:r>
-              <a:rPr lang="en-US" sz="1300" dirty="0">
+              <a:rPr lang="en-US" sz="1500" dirty="0">
                 <a:solidFill>
                   <a:srgbClr val="CBD5E1"/>
                 </a:solidFill>
@@ -7591,7 +7181,7 @@
               </a:rPr>
               <a:t>SOLO taxonomy for cognitive depth</a:t>
             </a:r>
-            <a:endParaRPr lang="en-US" sz="1300" dirty="0"/>
+            <a:endParaRPr lang="en-US" sz="1500" dirty="0"/>
           </a:p>
           <a:p>
             <a:pPr marL="342900" indent="-342900" algn="l">
@@ -7599,7 +7189,7 @@
               <a:buChar char="•"/>
             </a:pPr>
             <a:r>
-              <a:rPr lang="en-US" sz="1300" dirty="0">
+              <a:rPr lang="en-US" sz="1500" dirty="0">
                 <a:solidFill>
                   <a:srgbClr val="CBD5E1"/>
                 </a:solidFill>
@@ -7614,7 +7204,7 @@
             <a:pPr algn="l">
               <a:buSzPct val="100000"/>
             </a:pPr>
-            <a:endParaRPr lang="en-US" sz="1300" dirty="0">
+            <a:endParaRPr lang="en-US" sz="1500" dirty="0">
               <a:solidFill>
                 <a:srgbClr val="CBD5E1"/>
               </a:solidFill>
@@ -7628,38 +7218,53 @@
               <a:buSzPct val="100000"/>
               <a:buChar char="•"/>
             </a:pPr>
-            <a:r>
-              <a:rPr lang="en-US" sz="1300" dirty="0">
-                <a:solidFill>
-                  <a:srgbClr val="CBD5E1"/>
-                </a:solidFill>
-                <a:latin typeface="Calibri" pitchFamily="34" charset="0"/>
-                <a:ea typeface="Calibri" pitchFamily="34" charset="-122"/>
-                <a:cs typeface="Calibri" pitchFamily="34" charset="-120"/>
-              </a:rPr>
-              <a:t>Theory + structure = quality</a:t>
-            </a:r>
-          </a:p>
+            <a:endParaRPr lang="en-US" sz="1500" dirty="0"/>
+          </a:p>
+        </p:txBody>
+      </p:sp>
+      <p:sp>
+        <p:nvSpPr>
+          <p:cNvPr id="18" name="TextBox 17">
+            <a:extLst>
+              <a:ext uri="{FF2B5EF4-FFF2-40B4-BE49-F238E27FC236}">
+                <a16:creationId xmlns:a16="http://schemas.microsoft.com/office/drawing/2014/main" id="{6C991993-8B86-4381-820E-C8A886B28139}"/>
+              </a:ext>
+            </a:extLst>
+          </p:cNvPr>
+          <p:cNvSpPr txBox="1"/>
+          <p:nvPr/>
+        </p:nvSpPr>
+        <p:spPr>
+          <a:xfrm>
+            <a:off x="6637867" y="5098780"/>
+            <a:ext cx="6096000" cy="323165"/>
+          </a:xfrm>
+          <a:prstGeom prst="rect">
+            <a:avLst/>
+          </a:prstGeom>
+          <a:noFill/>
+        </p:spPr>
+        <p:txBody>
+          <a:bodyPr wrap="square">
+            <a:spAutoFit/>
+          </a:bodyPr>
+          <a:lstStyle/>
           <a:p>
             <a:pPr marL="342900" indent="-342900" algn="l">
               <a:buSzPct val="100000"/>
               <a:buChar char="•"/>
             </a:pPr>
-            <a:endParaRPr lang="en-US" sz="1300" dirty="0">
-              <a:solidFill>
-                <a:srgbClr val="CBD5E1"/>
-              </a:solidFill>
-              <a:latin typeface="Calibri" pitchFamily="34" charset="0"/>
-              <a:ea typeface="Calibri" pitchFamily="34" charset="-122"/>
-              <a:cs typeface="Calibri" pitchFamily="34" charset="-120"/>
-            </a:endParaRPr>
-          </a:p>
-          <a:p>
-            <a:pPr marL="342900" indent="-342900" algn="l">
-              <a:buSzPct val="100000"/>
-              <a:buChar char="•"/>
-            </a:pPr>
-            <a:endParaRPr lang="en-US" sz="1300" dirty="0"/>
+            <a:r>
+              <a:rPr lang="en-US" sz="1500" dirty="0">
+                <a:solidFill>
+                  <a:srgbClr val="CBD5E1"/>
+                </a:solidFill>
+                <a:latin typeface="Calibri" pitchFamily="34" charset="0"/>
+                <a:ea typeface="Calibri" pitchFamily="34" charset="-122"/>
+                <a:cs typeface="Calibri" pitchFamily="34" charset="-120"/>
+              </a:rPr>
+              <a:t>Theory + structure = quality</a:t>
+            </a:r>
           </a:p>
         </p:txBody>
       </p:sp>
@@ -7963,7 +7568,7 @@
               <a:buNone/>
             </a:pPr>
             <a:r>
-              <a:rPr lang="en-US" sz="1300" b="1" dirty="0">
+              <a:rPr lang="en-US" sz="1500" b="1" dirty="0">
                 <a:solidFill>
                   <a:srgbClr val="475569"/>
                 </a:solidFill>
@@ -7973,7 +7578,7 @@
               </a:rPr>
               <a:t>Prestructural</a:t>
             </a:r>
-            <a:endParaRPr lang="en-US" sz="1300" dirty="0"/>
+            <a:endParaRPr lang="en-US" sz="1500" dirty="0"/>
           </a:p>
         </p:txBody>
       </p:sp>
@@ -8002,7 +7607,7 @@
               <a:buNone/>
             </a:pPr>
             <a:r>
-              <a:rPr lang="en-US" sz="1000" dirty="0">
+              <a:rPr lang="en-US" sz="1200" dirty="0">
                 <a:solidFill>
                   <a:srgbClr val="475569"/>
                 </a:solidFill>
@@ -8012,14 +7617,14 @@
               </a:rPr>
               <a:t>No understanding;</a:t>
             </a:r>
-            <a:endParaRPr lang="en-US" sz="1000" dirty="0"/>
+            <a:endParaRPr lang="en-US" sz="1200" dirty="0"/>
           </a:p>
           <a:p>
             <a:pPr marL="0" indent="0" algn="ctr">
               <a:buNone/>
             </a:pPr>
             <a:r>
-              <a:rPr lang="en-US" sz="1000" dirty="0">
+              <a:rPr lang="en-US" sz="1200" dirty="0">
                 <a:solidFill>
                   <a:srgbClr val="475569"/>
                 </a:solidFill>
@@ -8029,14 +7634,14 @@
               </a:rPr>
               <a:t>responses missed</a:t>
             </a:r>
-            <a:endParaRPr lang="en-US" sz="1000" dirty="0"/>
+            <a:endParaRPr lang="en-US" sz="1200" dirty="0"/>
           </a:p>
           <a:p>
             <a:pPr marL="0" indent="0" algn="ctr">
               <a:buNone/>
             </a:pPr>
             <a:r>
-              <a:rPr lang="en-US" sz="1000" dirty="0">
+              <a:rPr lang="en-US" sz="1200" dirty="0">
                 <a:solidFill>
                   <a:srgbClr val="475569"/>
                 </a:solidFill>
@@ -8046,7 +7651,7 @@
               </a:rPr>
               <a:t>or irrelevant</a:t>
             </a:r>
-            <a:endParaRPr lang="en-US" sz="1000" dirty="0"/>
+            <a:endParaRPr lang="en-US" sz="1200" dirty="0"/>
           </a:p>
         </p:txBody>
       </p:sp>
@@ -8200,7 +7805,7 @@
               <a:buNone/>
             </a:pPr>
             <a:r>
-              <a:rPr lang="en-US" sz="1300" b="1" dirty="0">
+              <a:rPr lang="en-US" sz="1500" b="1" dirty="0">
                 <a:solidFill>
                   <a:srgbClr val="0A2540"/>
                 </a:solidFill>
@@ -8210,7 +7815,7 @@
               </a:rPr>
               <a:t>Unistructural</a:t>
             </a:r>
-            <a:endParaRPr lang="en-US" sz="1300" dirty="0"/>
+            <a:endParaRPr lang="en-US" sz="1500" dirty="0"/>
           </a:p>
         </p:txBody>
       </p:sp>
@@ -8239,7 +7844,7 @@
               <a:buNone/>
             </a:pPr>
             <a:r>
-              <a:rPr lang="en-US" sz="1000" dirty="0">
+              <a:rPr lang="en-US" sz="1200" dirty="0">
                 <a:solidFill>
                   <a:srgbClr val="475569"/>
                 </a:solidFill>
@@ -8249,14 +7854,14 @@
               </a:rPr>
               <a:t>Grasps a single</a:t>
             </a:r>
-            <a:endParaRPr lang="en-US" sz="1000" dirty="0"/>
+            <a:endParaRPr lang="en-US" sz="1200" dirty="0"/>
           </a:p>
           <a:p>
             <a:pPr marL="0" indent="0" algn="ctr">
               <a:buNone/>
             </a:pPr>
             <a:r>
-              <a:rPr lang="en-US" sz="1000" dirty="0">
+              <a:rPr lang="en-US" sz="1200" dirty="0">
                 <a:solidFill>
                   <a:srgbClr val="475569"/>
                 </a:solidFill>
@@ -8266,14 +7871,14 @@
               </a:rPr>
               <a:t>aspect of the</a:t>
             </a:r>
-            <a:endParaRPr lang="en-US" sz="1000" dirty="0"/>
+            <a:endParaRPr lang="en-US" sz="1200" dirty="0"/>
           </a:p>
           <a:p>
             <a:pPr marL="0" indent="0" algn="ctr">
               <a:buNone/>
             </a:pPr>
             <a:r>
-              <a:rPr lang="en-US" sz="1000" dirty="0">
+              <a:rPr lang="en-US" sz="1200" dirty="0">
                 <a:solidFill>
                   <a:srgbClr val="475569"/>
                 </a:solidFill>
@@ -8283,7 +7888,7 @@
               </a:rPr>
               <a:t>concept</a:t>
             </a:r>
-            <a:endParaRPr lang="en-US" sz="1000" dirty="0"/>
+            <a:endParaRPr lang="en-US" sz="1200" dirty="0"/>
           </a:p>
         </p:txBody>
       </p:sp>
@@ -8437,7 +8042,7 @@
               <a:buNone/>
             </a:pPr>
             <a:r>
-              <a:rPr lang="en-US" sz="1300" b="1" dirty="0">
+              <a:rPr lang="en-US" sz="1500" b="1" dirty="0">
                 <a:solidFill>
                   <a:srgbClr val="0A2540"/>
                 </a:solidFill>
@@ -8447,7 +8052,7 @@
               </a:rPr>
               <a:t>Multistructural</a:t>
             </a:r>
-            <a:endParaRPr lang="en-US" sz="1300" dirty="0"/>
+            <a:endParaRPr lang="en-US" sz="1500" dirty="0"/>
           </a:p>
         </p:txBody>
       </p:sp>
@@ -8476,7 +8081,7 @@
               <a:buNone/>
             </a:pPr>
             <a:r>
-              <a:rPr lang="en-US" sz="1000" dirty="0">
+              <a:rPr lang="en-US" sz="1200" dirty="0">
                 <a:solidFill>
                   <a:srgbClr val="475569"/>
                 </a:solidFill>
@@ -8486,14 +8091,14 @@
               </a:rPr>
               <a:t>Understands several</a:t>
             </a:r>
-            <a:endParaRPr lang="en-US" sz="1000" dirty="0"/>
+            <a:endParaRPr lang="en-US" sz="1200" dirty="0"/>
           </a:p>
           <a:p>
             <a:pPr marL="0" indent="0" algn="ctr">
               <a:buNone/>
             </a:pPr>
             <a:r>
-              <a:rPr lang="en-US" sz="1000" dirty="0">
+              <a:rPr lang="en-US" sz="1200" dirty="0">
                 <a:solidFill>
                   <a:srgbClr val="475569"/>
                 </a:solidFill>
@@ -8503,14 +8108,14 @@
               </a:rPr>
               <a:t>aspects but not</a:t>
             </a:r>
-            <a:endParaRPr lang="en-US" sz="1000" dirty="0"/>
+            <a:endParaRPr lang="en-US" sz="1200" dirty="0"/>
           </a:p>
           <a:p>
             <a:pPr marL="0" indent="0" algn="ctr">
               <a:buNone/>
             </a:pPr>
             <a:r>
-              <a:rPr lang="en-US" sz="1000" dirty="0">
+              <a:rPr lang="en-US" sz="1200" dirty="0">
                 <a:solidFill>
                   <a:srgbClr val="475569"/>
                 </a:solidFill>
@@ -8520,7 +8125,7 @@
               </a:rPr>
               <a:t>their connections</a:t>
             </a:r>
-            <a:endParaRPr lang="en-US" sz="1000" dirty="0"/>
+            <a:endParaRPr lang="en-US" sz="1200" dirty="0"/>
           </a:p>
         </p:txBody>
       </p:sp>
@@ -8674,7 +8279,7 @@
               <a:buNone/>
             </a:pPr>
             <a:r>
-              <a:rPr lang="en-US" sz="1300" b="1" dirty="0">
+              <a:rPr lang="en-US" sz="1500" b="1" dirty="0">
                 <a:solidFill>
                   <a:srgbClr val="0A2540"/>
                 </a:solidFill>
@@ -8684,7 +8289,7 @@
               </a:rPr>
               <a:t>Relational</a:t>
             </a:r>
-            <a:endParaRPr lang="en-US" sz="1300" dirty="0"/>
+            <a:endParaRPr lang="en-US" sz="1500" dirty="0"/>
           </a:p>
         </p:txBody>
       </p:sp>
@@ -8713,7 +8318,7 @@
               <a:buNone/>
             </a:pPr>
             <a:r>
-              <a:rPr lang="en-US" sz="1000" dirty="0">
+              <a:rPr lang="en-US" sz="1200" dirty="0">
                 <a:solidFill>
                   <a:srgbClr val="475569"/>
                 </a:solidFill>
@@ -8723,14 +8328,14 @@
               </a:rPr>
               <a:t>Integrates pieces</a:t>
             </a:r>
-            <a:endParaRPr lang="en-US" sz="1000" dirty="0"/>
+            <a:endParaRPr lang="en-US" sz="1200" dirty="0"/>
           </a:p>
           <a:p>
             <a:pPr marL="0" indent="0" algn="ctr">
               <a:buNone/>
             </a:pPr>
             <a:r>
-              <a:rPr lang="en-US" sz="1000" dirty="0">
+              <a:rPr lang="en-US" sz="1200" dirty="0">
                 <a:solidFill>
                   <a:srgbClr val="475569"/>
                 </a:solidFill>
@@ -8740,14 +8345,14 @@
               </a:rPr>
               <a:t>into a coherent</a:t>
             </a:r>
-            <a:endParaRPr lang="en-US" sz="1000" dirty="0"/>
+            <a:endParaRPr lang="en-US" sz="1200" dirty="0"/>
           </a:p>
           <a:p>
             <a:pPr marL="0" indent="0" algn="ctr">
               <a:buNone/>
             </a:pPr>
             <a:r>
-              <a:rPr lang="en-US" sz="1000" dirty="0">
+              <a:rPr lang="en-US" sz="1200" dirty="0">
                 <a:solidFill>
                   <a:srgbClr val="475569"/>
                 </a:solidFill>
@@ -8757,7 +8362,7 @@
               </a:rPr>
               <a:t>whole</a:t>
             </a:r>
-            <a:endParaRPr lang="en-US" sz="1000" dirty="0"/>
+            <a:endParaRPr lang="en-US" sz="1200" dirty="0"/>
           </a:p>
         </p:txBody>
       </p:sp>
@@ -8911,7 +8516,7 @@
               <a:buNone/>
             </a:pPr>
             <a:r>
-              <a:rPr lang="en-US" sz="1300" b="1" dirty="0">
+              <a:rPr lang="en-US" sz="1500" b="1" dirty="0">
                 <a:solidFill>
                   <a:srgbClr val="0A2540"/>
                 </a:solidFill>
@@ -8921,7 +8526,7 @@
               </a:rPr>
               <a:t>Extended Abstract</a:t>
             </a:r>
-            <a:endParaRPr lang="en-US" sz="1300" dirty="0"/>
+            <a:endParaRPr lang="en-US" sz="1500" dirty="0"/>
           </a:p>
         </p:txBody>
       </p:sp>
@@ -8950,7 +8555,7 @@
               <a:buNone/>
             </a:pPr>
             <a:r>
-              <a:rPr lang="en-US" sz="1000" dirty="0">
+              <a:rPr lang="en-US" sz="1200" dirty="0">
                 <a:solidFill>
                   <a:srgbClr val="475569"/>
                 </a:solidFill>
@@ -8960,14 +8565,14 @@
               </a:rPr>
               <a:t>Generalizes &amp;</a:t>
             </a:r>
-            <a:endParaRPr lang="en-US" sz="1000" dirty="0"/>
+            <a:endParaRPr lang="en-US" sz="1200" dirty="0"/>
           </a:p>
           <a:p>
             <a:pPr marL="0" indent="0" algn="ctr">
               <a:buNone/>
             </a:pPr>
             <a:r>
-              <a:rPr lang="en-US" sz="1000" dirty="0">
+              <a:rPr lang="en-US" sz="1200" dirty="0">
                 <a:solidFill>
                   <a:srgbClr val="475569"/>
                 </a:solidFill>
@@ -8977,14 +8582,14 @@
               </a:rPr>
               <a:t>applies to new</a:t>
             </a:r>
-            <a:endParaRPr lang="en-US" sz="1000" dirty="0"/>
+            <a:endParaRPr lang="en-US" sz="1200" dirty="0"/>
           </a:p>
           <a:p>
             <a:pPr marL="0" indent="0" algn="ctr">
               <a:buNone/>
             </a:pPr>
             <a:r>
-              <a:rPr lang="en-US" sz="1000" dirty="0">
+              <a:rPr lang="en-US" sz="1200" dirty="0">
                 <a:solidFill>
                   <a:srgbClr val="475569"/>
                 </a:solidFill>
@@ -8994,7 +8599,7 @@
               </a:rPr>
               <a:t>situations</a:t>
             </a:r>
-            <a:endParaRPr lang="en-US" sz="1000" dirty="0"/>
+            <a:endParaRPr lang="en-US" sz="1200" dirty="0"/>
           </a:p>
         </p:txBody>
       </p:sp>
@@ -9050,7 +8655,7 @@
               <a:buNone/>
             </a:pPr>
             <a:r>
-              <a:rPr lang="en-US" sz="1200" i="1" dirty="0">
+              <a:rPr lang="en-US" sz="1400" i="1" dirty="0">
                 <a:solidFill>
                   <a:srgbClr val="475569"/>
                 </a:solidFill>
@@ -9060,7 +8665,7 @@
               </a:rPr>
               <a:t>Our system targets levels 2 → 5. Prestructural is excluded as it represents absent understanding.</a:t>
             </a:r>
-            <a:endParaRPr lang="en-US" sz="1200" dirty="0"/>
+            <a:endParaRPr lang="en-US" sz="1400" dirty="0"/>
           </a:p>
         </p:txBody>
       </p:sp>
@@ -9240,7 +8845,7 @@
               </a:rPr>
               <a:t>03 · RELATED WORK</a:t>
             </a:r>
-            <a:endParaRPr lang="en-US" sz="1100" dirty="0"/>
+            <a:endParaRPr lang="en-US" sz="1300" dirty="0"/>
           </a:p>
         </p:txBody>
       </p:sp>
@@ -9367,7 +8972,7 @@
               <a:buNone/>
             </a:pPr>
             <a:r>
-              <a:rPr lang="en-US" sz="1600" b="1" dirty="0">
+              <a:rPr lang="en-US" sz="1800" b="1" dirty="0">
                 <a:solidFill>
                   <a:srgbClr val="0A2540"/>
                 </a:solidFill>
@@ -9377,7 +8982,7 @@
               </a:rPr>
               <a:t>Rule-Based Generation</a:t>
             </a:r>
-            <a:endParaRPr lang="en-US" sz="1600" dirty="0"/>
+            <a:endParaRPr lang="en-US" sz="1800" dirty="0"/>
           </a:p>
         </p:txBody>
       </p:sp>
@@ -9416,7 +9021,7 @@
               </a:rPr>
               <a:t>Mitkov &amp; Ha (2003)</a:t>
             </a:r>
-            <a:endParaRPr lang="en-US" sz="1100" dirty="0"/>
+            <a:endParaRPr lang="en-US" sz="1300" dirty="0"/>
           </a:p>
         </p:txBody>
       </p:sp>
@@ -9445,7 +9050,7 @@
               <a:buNone/>
             </a:pPr>
             <a:r>
-              <a:rPr lang="en-US" sz="1100" dirty="0">
+              <a:rPr lang="en-US" sz="1300" dirty="0">
                 <a:solidFill>
                   <a:srgbClr val="475569"/>
                 </a:solidFill>
@@ -9455,7 +9060,7 @@
               </a:rPr>
               <a:t>Used NLP rules to transform declarative sentences into questions. Effective for simple facts but produced awkward output on complex material.</a:t>
             </a:r>
-            <a:endParaRPr lang="en-US" sz="1100" dirty="0"/>
+            <a:endParaRPr lang="en-US" sz="1300" dirty="0"/>
           </a:p>
         </p:txBody>
       </p:sp>
@@ -9543,7 +9148,7 @@
               <a:buNone/>
             </a:pPr>
             <a:r>
-              <a:rPr lang="en-US" sz="1600" b="1" dirty="0">
+              <a:rPr lang="en-US" sz="1800" b="1" dirty="0">
                 <a:solidFill>
                   <a:srgbClr val="0A2540"/>
                 </a:solidFill>
@@ -9553,7 +9158,7 @@
               </a:rPr>
               <a:t>SOLO for Programming</a:t>
             </a:r>
-            <a:endParaRPr lang="en-US" sz="1600" dirty="0"/>
+            <a:endParaRPr lang="en-US" sz="1800" dirty="0"/>
           </a:p>
         </p:txBody>
       </p:sp>
@@ -9592,7 +9197,7 @@
               </a:rPr>
               <a:t>Lister et al. (2006)</a:t>
             </a:r>
-            <a:endParaRPr lang="en-US" sz="1100" dirty="0"/>
+            <a:endParaRPr lang="en-US" sz="1300" dirty="0"/>
           </a:p>
         </p:txBody>
       </p:sp>
@@ -9621,7 +9226,7 @@
               <a:buNone/>
             </a:pPr>
             <a:r>
-              <a:rPr lang="en-US" sz="1100" dirty="0">
+              <a:rPr lang="en-US" sz="1300" dirty="0">
                 <a:solidFill>
                   <a:srgbClr val="475569"/>
                 </a:solidFill>
@@ -9631,7 +9236,7 @@
               </a:rPr>
               <a:t>Showed assessments can be classified by SOLO levels. Critiqued over-emphasis on low-level skills and gave us our taxonomic frame.</a:t>
             </a:r>
-            <a:endParaRPr lang="en-US" sz="1100" dirty="0"/>
+            <a:endParaRPr lang="en-US" sz="1300" dirty="0"/>
           </a:p>
         </p:txBody>
       </p:sp>
@@ -9719,7 +9324,7 @@
               <a:buNone/>
             </a:pPr>
             <a:r>
-              <a:rPr lang="en-US" sz="1600" b="1" dirty="0">
+              <a:rPr lang="en-US" sz="1800" b="1" dirty="0">
                 <a:solidFill>
                   <a:srgbClr val="0A2540"/>
                 </a:solidFill>
@@ -9729,7 +9334,7 @@
               </a:rPr>
               <a:t>Distractor Quality</a:t>
             </a:r>
-            <a:endParaRPr lang="en-US" sz="1600" dirty="0"/>
+            <a:endParaRPr lang="en-US" sz="1800" dirty="0"/>
           </a:p>
         </p:txBody>
       </p:sp>
@@ -9768,7 +9373,7 @@
               </a:rPr>
               <a:t>Liang et al. (2018)</a:t>
             </a:r>
-            <a:endParaRPr lang="en-US" sz="1100" dirty="0"/>
+            <a:endParaRPr lang="en-US" sz="1300" dirty="0"/>
           </a:p>
         </p:txBody>
       </p:sp>
@@ -9797,7 +9402,7 @@
               <a:buNone/>
             </a:pPr>
             <a:r>
-              <a:rPr lang="en-US" sz="1100" dirty="0">
+              <a:rPr lang="en-US" sz="1300" dirty="0">
                 <a:solidFill>
                   <a:srgbClr val="475569"/>
                 </a:solidFill>
@@ -9807,7 +9412,7 @@
               </a:rPr>
               <a:t>Proposed a learn-to-rank approach. Key insight: good distractors should be semantically related yet clearly wrong on close reading.</a:t>
             </a:r>
-            <a:endParaRPr lang="en-US" sz="1100" dirty="0"/>
+            <a:endParaRPr lang="en-US" sz="1300" dirty="0"/>
           </a:p>
         </p:txBody>
       </p:sp>
@@ -9895,7 +9500,7 @@
               <a:buNone/>
             </a:pPr>
             <a:r>
-              <a:rPr lang="en-US" sz="1600" b="1" dirty="0">
+              <a:rPr lang="en-US" sz="1800" b="1" dirty="0">
                 <a:solidFill>
                   <a:srgbClr val="0A2540"/>
                 </a:solidFill>
@@ -9905,7 +9510,7 @@
               </a:rPr>
               <a:t>LLMs in Education</a:t>
             </a:r>
-            <a:endParaRPr lang="en-US" sz="1600" dirty="0"/>
+            <a:endParaRPr lang="en-US" sz="1800" dirty="0"/>
           </a:p>
         </p:txBody>
       </p:sp>
@@ -9944,7 +9549,7 @@
               </a:rPr>
               <a:t>Kasneci et al. (2023)</a:t>
             </a:r>
-            <a:endParaRPr lang="en-US" sz="1100" dirty="0"/>
+            <a:endParaRPr lang="en-US" sz="1300" dirty="0"/>
           </a:p>
         </p:txBody>
       </p:sp>
@@ -9973,7 +9578,7 @@
               <a:buNone/>
             </a:pPr>
             <a:r>
-              <a:rPr lang="en-US" sz="1100" dirty="0">
+              <a:rPr lang="en-US" sz="1300" dirty="0">
                 <a:solidFill>
                   <a:srgbClr val="475569"/>
                 </a:solidFill>
@@ -9983,7 +9588,7 @@
               </a:rPr>
               <a:t>Reviewed ChatGPT in education — fast and diverse generation, but raised concerns about accuracy, bias, and need for teacher oversight.</a:t>
             </a:r>
-            <a:endParaRPr lang="en-US" sz="1100" dirty="0"/>
+            <a:endParaRPr lang="en-US" sz="1300" dirty="0"/>
           </a:p>
         </p:txBody>
       </p:sp>
@@ -10231,7 +9836,7 @@
               <a:buNone/>
             </a:pPr>
             <a:r>
-              <a:rPr lang="en-US" sz="1600" b="1" dirty="0">
+              <a:rPr lang="en-US" sz="1800" b="1" dirty="0">
                 <a:solidFill>
                   <a:srgbClr val="0A2540"/>
                 </a:solidFill>
@@ -10241,7 +9846,7 @@
               </a:rPr>
               <a:t>Three-tier monolithic web application</a:t>
             </a:r>
-            <a:endParaRPr lang="en-US" sz="1600" dirty="0"/>
+            <a:endParaRPr lang="en-US" sz="1800" dirty="0"/>
           </a:p>
         </p:txBody>
       </p:sp>
@@ -10274,7 +9879,7 @@
               <a:buChar char="•"/>
             </a:pPr>
             <a:r>
-              <a:rPr lang="en-US" sz="1200" dirty="0">
+              <a:rPr lang="en-US" sz="1500" dirty="0">
                 <a:solidFill>
                   <a:srgbClr val="0F172A"/>
                 </a:solidFill>
@@ -10284,7 +9889,7 @@
               </a:rPr>
               <a:t>Backend services: Translator, Assessment Generator, Content Parser</a:t>
             </a:r>
-            <a:endParaRPr lang="en-US" sz="1200" dirty="0"/>
+            <a:endParaRPr lang="en-US" sz="1500" dirty="0"/>
           </a:p>
           <a:p>
             <a:pPr marL="342900" indent="-342900" algn="l">
@@ -10295,7 +9900,7 @@
               <a:buChar char="•"/>
             </a:pPr>
             <a:r>
-              <a:rPr lang="en-US" sz="1200" dirty="0">
+              <a:rPr lang="en-US" sz="1500" dirty="0">
                 <a:solidFill>
                   <a:srgbClr val="0F172A"/>
                 </a:solidFill>
@@ -10305,7 +9910,7 @@
               </a:rPr>
               <a:t>Data model - hierarchical structure: Subject → Lesson → Section → Learning Object → Question → Assessment</a:t>
             </a:r>
-            <a:endParaRPr lang="en-US" sz="1200" dirty="0"/>
+            <a:endParaRPr lang="en-US" sz="1500" dirty="0"/>
           </a:p>
           <a:p>
             <a:pPr marL="342900" indent="-342900" algn="l">
@@ -10313,7 +9918,7 @@
               <a:buChar char="•"/>
             </a:pPr>
             <a:r>
-              <a:rPr lang="en-US" sz="1200" dirty="0">
+              <a:rPr lang="en-US" sz="1500" dirty="0">
                 <a:solidFill>
                   <a:srgbClr val="0F172A"/>
                 </a:solidFill>
@@ -10323,7 +9928,7 @@
               </a:rPr>
               <a:t>Knowledge layer - OWL ontology providing semantic enrichment and concept validation</a:t>
             </a:r>
-            <a:endParaRPr lang="en-US" sz="1200" dirty="0"/>
+            <a:endParaRPr lang="en-US" sz="1500" dirty="0"/>
           </a:p>
         </p:txBody>
       </p:sp>
@@ -10352,7 +9957,7 @@
               <a:buNone/>
             </a:pPr>
             <a:r>
-              <a:rPr lang="en-US" sz="1000" i="1" dirty="0">
+              <a:rPr lang="en-US" sz="1200" i="1" dirty="0">
                 <a:solidFill>
                   <a:srgbClr val="94A3B8"/>
                 </a:solidFill>
@@ -10362,7 +9967,7 @@
               </a:rPr>
               <a:t>Figure 1 Workflow diagram</a:t>
             </a:r>
-            <a:endParaRPr lang="en-US" sz="1000" dirty="0"/>
+            <a:endParaRPr lang="en-US" sz="1200" dirty="0"/>
           </a:p>
         </p:txBody>
       </p:sp>
@@ -10769,7 +10374,7 @@
               <a:buNone/>
             </a:pPr>
             <a:r>
-              <a:rPr lang="en-US" sz="1600" b="1" dirty="0">
+              <a:rPr lang="en-US" sz="1800" b="1" dirty="0">
                 <a:solidFill>
                   <a:srgbClr val="0A2540"/>
                 </a:solidFill>
@@ -10779,7 +10384,7 @@
               </a:rPr>
               <a:t>Ingest</a:t>
             </a:r>
-            <a:endParaRPr lang="en-US" sz="1600" dirty="0"/>
+            <a:endParaRPr lang="en-US" sz="1800" dirty="0"/>
           </a:p>
         </p:txBody>
       </p:sp>
@@ -10808,7 +10413,7 @@
               <a:buNone/>
             </a:pPr>
             <a:r>
-              <a:rPr lang="en-US" sz="1000" dirty="0">
+              <a:rPr lang="en-US" sz="1200" dirty="0">
                 <a:solidFill>
                   <a:srgbClr val="475569"/>
                 </a:solidFill>
@@ -10818,14 +10423,14 @@
               </a:rPr>
               <a:t>PDF lecture</a:t>
             </a:r>
-            <a:endParaRPr lang="en-US" sz="1000" dirty="0"/>
+            <a:endParaRPr lang="en-US" sz="1200" dirty="0"/>
           </a:p>
           <a:p>
             <a:pPr marL="0" indent="0" algn="ctr">
               <a:buNone/>
             </a:pPr>
             <a:r>
-              <a:rPr lang="en-US" sz="1000" dirty="0">
+              <a:rPr lang="en-US" sz="1200" dirty="0">
                 <a:solidFill>
                   <a:srgbClr val="475569"/>
                 </a:solidFill>
@@ -10835,7 +10440,7 @@
               </a:rPr>
               <a:t>notes uploaded</a:t>
             </a:r>
-            <a:endParaRPr lang="en-US" sz="1000" dirty="0"/>
+            <a:endParaRPr lang="en-US" sz="1200" dirty="0"/>
           </a:p>
         </p:txBody>
       </p:sp>
@@ -11006,7 +10611,7 @@
               <a:buNone/>
             </a:pPr>
             <a:r>
-              <a:rPr lang="en-US" sz="1600" b="1" dirty="0">
+              <a:rPr lang="en-US" sz="1800" b="1" dirty="0">
                 <a:solidFill>
                   <a:srgbClr val="0A2540"/>
                 </a:solidFill>
@@ -11016,7 +10621,7 @@
               </a:rPr>
               <a:t>Parse</a:t>
             </a:r>
-            <a:endParaRPr lang="en-US" sz="1600" dirty="0"/>
+            <a:endParaRPr lang="en-US" sz="1800" dirty="0"/>
           </a:p>
         </p:txBody>
       </p:sp>
@@ -11045,7 +10650,7 @@
               <a:buNone/>
             </a:pPr>
             <a:r>
-              <a:rPr lang="en-US" sz="1000" dirty="0">
+              <a:rPr lang="en-US" sz="1200" dirty="0">
                 <a:solidFill>
                   <a:srgbClr val="475569"/>
                 </a:solidFill>
@@ -11055,14 +10660,14 @@
               </a:rPr>
               <a:t>LLM extracts</a:t>
             </a:r>
-            <a:endParaRPr lang="en-US" sz="1000" dirty="0"/>
+            <a:endParaRPr lang="en-US" sz="1200" dirty="0"/>
           </a:p>
           <a:p>
             <a:pPr marL="0" indent="0" algn="ctr">
               <a:buNone/>
             </a:pPr>
             <a:r>
-              <a:rPr lang="en-US" sz="1000" dirty="0">
+              <a:rPr lang="en-US" sz="1200" dirty="0">
                 <a:solidFill>
                   <a:srgbClr val="475569"/>
                 </a:solidFill>
@@ -11072,7 +10677,7 @@
               </a:rPr>
               <a:t>logical components</a:t>
             </a:r>
-            <a:endParaRPr lang="en-US" sz="1000" dirty="0"/>
+            <a:endParaRPr lang="en-US" sz="1200" dirty="0"/>
           </a:p>
         </p:txBody>
       </p:sp>
@@ -11243,7 +10848,7 @@
               <a:buNone/>
             </a:pPr>
             <a:r>
-              <a:rPr lang="en-US" sz="1600" b="1" dirty="0">
+              <a:rPr lang="en-US" sz="1800" b="1" dirty="0">
                 <a:solidFill>
                   <a:srgbClr val="0A2540"/>
                 </a:solidFill>
@@ -11253,7 +10858,7 @@
               </a:rPr>
               <a:t>Structure</a:t>
             </a:r>
-            <a:endParaRPr lang="en-US" sz="1600" dirty="0"/>
+            <a:endParaRPr lang="en-US" sz="1800" dirty="0"/>
           </a:p>
         </p:txBody>
       </p:sp>
@@ -11282,7 +10887,7 @@
               <a:buNone/>
             </a:pPr>
             <a:r>
-              <a:rPr lang="en-US" sz="1000" dirty="0">
+              <a:rPr lang="en-US" sz="1200" dirty="0">
                 <a:solidFill>
                   <a:srgbClr val="475569"/>
                 </a:solidFill>
@@ -11292,14 +10897,14 @@
               </a:rPr>
               <a:t>Hierarchy stored:</a:t>
             </a:r>
-            <a:endParaRPr lang="en-US" sz="1000" dirty="0"/>
+            <a:endParaRPr lang="en-US" sz="1200" dirty="0"/>
           </a:p>
           <a:p>
             <a:pPr marL="0" indent="0" algn="ctr">
               <a:buNone/>
             </a:pPr>
             <a:r>
-              <a:rPr lang="en-US" sz="1000" dirty="0">
+              <a:rPr lang="en-US" sz="1200" dirty="0">
                 <a:solidFill>
                   <a:srgbClr val="475569"/>
                 </a:solidFill>
@@ -11309,14 +10914,14 @@
               </a:rPr>
               <a:t>Lessons → Sections</a:t>
             </a:r>
-            <a:endParaRPr lang="en-US" sz="1000" dirty="0"/>
+            <a:endParaRPr lang="en-US" sz="1200" dirty="0"/>
           </a:p>
           <a:p>
             <a:pPr marL="0" indent="0" algn="ctr">
               <a:buNone/>
             </a:pPr>
             <a:r>
-              <a:rPr lang="en-US" sz="1000" dirty="0">
+              <a:rPr lang="en-US" sz="1200" dirty="0">
                 <a:solidFill>
                   <a:srgbClr val="475569"/>
                 </a:solidFill>
@@ -11326,7 +10931,7 @@
               </a:rPr>
               <a:t>→ Learning Objects</a:t>
             </a:r>
-            <a:endParaRPr lang="en-US" sz="1000" dirty="0"/>
+            <a:endParaRPr lang="en-US" sz="1200" dirty="0"/>
           </a:p>
         </p:txBody>
       </p:sp>
@@ -11497,7 +11102,7 @@
               <a:buNone/>
             </a:pPr>
             <a:r>
-              <a:rPr lang="en-US" sz="1600" b="1" dirty="0">
+              <a:rPr lang="en-US" sz="1800" b="1" dirty="0">
                 <a:solidFill>
                   <a:srgbClr val="0A2540"/>
                 </a:solidFill>
@@ -11507,7 +11112,7 @@
               </a:rPr>
               <a:t>Enrich</a:t>
             </a:r>
-            <a:endParaRPr lang="en-US" sz="1600" dirty="0"/>
+            <a:endParaRPr lang="en-US" sz="1800" dirty="0"/>
           </a:p>
         </p:txBody>
       </p:sp>
@@ -11536,7 +11141,7 @@
               <a:buNone/>
             </a:pPr>
             <a:r>
-              <a:rPr lang="en-US" sz="1000" dirty="0">
+              <a:rPr lang="en-US" sz="1200" dirty="0">
                 <a:solidFill>
                   <a:srgbClr val="475569"/>
                 </a:solidFill>
@@ -11546,14 +11151,14 @@
               </a:rPr>
               <a:t>Ontology relations</a:t>
             </a:r>
-            <a:endParaRPr lang="en-US" sz="1000" dirty="0"/>
+            <a:endParaRPr lang="en-US" sz="1200" dirty="0"/>
           </a:p>
           <a:p>
             <a:pPr marL="0" indent="0" algn="ctr">
               <a:buNone/>
             </a:pPr>
             <a:r>
-              <a:rPr lang="en-US" sz="1000" dirty="0">
+              <a:rPr lang="en-US" sz="1200" dirty="0">
                 <a:solidFill>
                   <a:srgbClr val="475569"/>
                 </a:solidFill>
@@ -11563,14 +11168,14 @@
               </a:rPr>
               <a:t>built, exported</a:t>
             </a:r>
-            <a:endParaRPr lang="en-US" sz="1000" dirty="0"/>
+            <a:endParaRPr lang="en-US" sz="1200" dirty="0"/>
           </a:p>
           <a:p>
             <a:pPr marL="0" indent="0" algn="ctr">
               <a:buNone/>
             </a:pPr>
             <a:r>
-              <a:rPr lang="en-US" sz="1000" dirty="0">
+              <a:rPr lang="en-US" sz="1200" dirty="0">
                 <a:solidFill>
                   <a:srgbClr val="475569"/>
                 </a:solidFill>
@@ -11580,7 +11185,7 @@
               </a:rPr>
               <a:t>as OWL</a:t>
             </a:r>
-            <a:endParaRPr lang="en-US" sz="1000" dirty="0"/>
+            <a:endParaRPr lang="en-US" sz="1200" dirty="0"/>
           </a:p>
         </p:txBody>
       </p:sp>
@@ -11751,7 +11356,7 @@
               <a:buNone/>
             </a:pPr>
             <a:r>
-              <a:rPr lang="en-US" sz="1600" b="1" dirty="0">
+              <a:rPr lang="en-US" sz="1800" b="1" dirty="0">
                 <a:solidFill>
                   <a:srgbClr val="0A2540"/>
                 </a:solidFill>
@@ -11761,7 +11366,7 @@
               </a:rPr>
               <a:t>Generate</a:t>
             </a:r>
-            <a:endParaRPr lang="en-US" sz="1600" dirty="0"/>
+            <a:endParaRPr lang="en-US" sz="1800" dirty="0"/>
           </a:p>
         </p:txBody>
       </p:sp>
@@ -11790,7 +11395,7 @@
               <a:buNone/>
             </a:pPr>
             <a:r>
-              <a:rPr lang="en-US" sz="1000" dirty="0">
+              <a:rPr lang="en-US" sz="1200" dirty="0">
                 <a:solidFill>
                   <a:srgbClr val="475569"/>
                 </a:solidFill>
@@ -11800,14 +11405,14 @@
               </a:rPr>
               <a:t>Items produced</a:t>
             </a:r>
-            <a:endParaRPr lang="en-US" sz="1000" dirty="0"/>
+            <a:endParaRPr lang="en-US" sz="1200" dirty="0"/>
           </a:p>
           <a:p>
             <a:pPr marL="0" indent="0" algn="ctr">
               <a:buNone/>
             </a:pPr>
             <a:r>
-              <a:rPr lang="en-US" sz="1000" dirty="0">
+              <a:rPr lang="en-US" sz="1200" dirty="0">
                 <a:solidFill>
                   <a:srgbClr val="475569"/>
                 </a:solidFill>
@@ -11817,7 +11422,7 @@
               </a:rPr>
               <a:t>for 4 SOLO levels</a:t>
             </a:r>
-            <a:endParaRPr lang="en-US" sz="1000" dirty="0"/>
+            <a:endParaRPr lang="en-US" sz="1200" dirty="0"/>
           </a:p>
         </p:txBody>
       </p:sp>
@@ -11910,7 +11515,7 @@
               </a:rPr>
               <a:t>Model used in this study</a:t>
             </a:r>
-            <a:endParaRPr lang="en-US" sz="1200" dirty="0"/>
+            <a:endParaRPr lang="en-US" sz="1500" dirty="0"/>
           </a:p>
         </p:txBody>
       </p:sp>
@@ -11939,7 +11544,7 @@
               <a:buNone/>
             </a:pPr>
             <a:r>
-              <a:rPr lang="en-US" sz="1200" dirty="0">
+              <a:rPr lang="en-US" sz="1500" dirty="0">
                 <a:solidFill>
                   <a:srgbClr val="475569"/>
                 </a:solidFill>
@@ -11947,9 +11552,9 @@
                 <a:ea typeface="Calibri" pitchFamily="34" charset="-122"/>
                 <a:cs typeface="Calibri" pitchFamily="34" charset="-120"/>
               </a:rPr>
-              <a:t>Local Qwen 2.5 (14B parameters) — runs offline, no API keys required. Architecture is model-agnostic, so swapping in another LLM is straightforward.</a:t>
-            </a:r>
-            <a:endParaRPr lang="en-US" sz="1200" dirty="0"/>
+              <a:t>Local Qwen 2.5 (14B parameters) - runs offline, no API keys required. Architecture is model-agnostic, so swapping in another LLM is straightforward.</a:t>
+            </a:r>
+            <a:endParaRPr lang="en-US" sz="1500" dirty="0"/>
           </a:p>
         </p:txBody>
       </p:sp>
@@ -12129,7 +11734,7 @@
               </a:rPr>
               <a:t>06 · GENERATION STRATEGY</a:t>
             </a:r>
-            <a:endParaRPr lang="en-US" sz="1100" dirty="0"/>
+            <a:endParaRPr lang="en-US" sz="1300" dirty="0"/>
           </a:p>
         </p:txBody>
       </p:sp>
@@ -12197,7 +11802,7 @@
               <a:buNone/>
             </a:pPr>
             <a:r>
-              <a:rPr lang="en-US" sz="1300" i="1" dirty="0">
+              <a:rPr lang="en-US" sz="1500" i="1" dirty="0">
                 <a:solidFill>
                   <a:srgbClr val="475569"/>
                 </a:solidFill>
@@ -12207,7 +11812,7 @@
               </a:rPr>
               <a:t>Each level uses a tailored prompt adapted to its cognitive complexity. Every item is stored with options, correct answer, and explanation.</a:t>
             </a:r>
-            <a:endParaRPr lang="en-US" sz="1300" dirty="0"/>
+            <a:endParaRPr lang="en-US" sz="1500" dirty="0"/>
           </a:p>
         </p:txBody>
       </p:sp>
@@ -12295,7 +11900,7 @@
               <a:buNone/>
             </a:pPr>
             <a:r>
-              <a:rPr lang="en-US" sz="1400" b="1" dirty="0">
+              <a:rPr lang="en-US" sz="1500" b="1" dirty="0">
                 <a:solidFill>
                   <a:srgbClr val="FFFFFF"/>
                 </a:solidFill>
@@ -12305,7 +11910,7 @@
               </a:rPr>
               <a:t>Unistructural</a:t>
             </a:r>
-            <a:endParaRPr lang="en-US" sz="1400" dirty="0"/>
+            <a:endParaRPr lang="en-US" sz="1500" dirty="0"/>
           </a:p>
         </p:txBody>
       </p:sp>
@@ -12481,7 +12086,7 @@
               <a:buNone/>
             </a:pPr>
             <a:r>
-              <a:rPr lang="en-US" sz="1100" dirty="0">
+              <a:rPr lang="en-US" sz="1300" dirty="0">
                 <a:solidFill>
                   <a:srgbClr val="475569"/>
                 </a:solidFill>
@@ -12491,7 +12096,7 @@
               </a:rPr>
               <a:t>Asks about one isolated concept or definition.</a:t>
             </a:r>
-            <a:endParaRPr lang="en-US" sz="1100" dirty="0"/>
+            <a:endParaRPr lang="en-US" sz="1300" dirty="0"/>
           </a:p>
         </p:txBody>
       </p:sp>
@@ -12579,7 +12184,7 @@
               <a:buNone/>
             </a:pPr>
             <a:r>
-              <a:rPr lang="en-US" sz="1400" b="1" dirty="0">
+              <a:rPr lang="en-US" sz="1500" b="1" dirty="0">
                 <a:solidFill>
                   <a:srgbClr val="FFFFFF"/>
                 </a:solidFill>
@@ -12589,7 +12194,7 @@
               </a:rPr>
               <a:t>Multistructural</a:t>
             </a:r>
-            <a:endParaRPr lang="en-US" sz="1400" dirty="0"/>
+            <a:endParaRPr lang="en-US" sz="1500" dirty="0"/>
           </a:p>
         </p:txBody>
       </p:sp>
@@ -12765,7 +12370,7 @@
               <a:buNone/>
             </a:pPr>
             <a:r>
-              <a:rPr lang="en-US" sz="1100" dirty="0">
+              <a:rPr lang="en-US" sz="1300" dirty="0">
                 <a:solidFill>
                   <a:srgbClr val="475569"/>
                 </a:solidFill>
@@ -12775,7 +12380,7 @@
               </a:rPr>
               <a:t>Compares or lists several independent aspects.</a:t>
             </a:r>
-            <a:endParaRPr lang="en-US" sz="1100" dirty="0"/>
+            <a:endParaRPr lang="en-US" sz="1300" dirty="0"/>
           </a:p>
         </p:txBody>
       </p:sp>
@@ -12863,7 +12468,7 @@
               <a:buNone/>
             </a:pPr>
             <a:r>
-              <a:rPr lang="en-US" sz="1400" b="1" dirty="0">
+              <a:rPr lang="en-US" sz="1500" b="1" dirty="0">
                 <a:solidFill>
                   <a:srgbClr val="FFFFFF"/>
                 </a:solidFill>
@@ -12873,7 +12478,7 @@
               </a:rPr>
               <a:t>Relational</a:t>
             </a:r>
-            <a:endParaRPr lang="en-US" sz="1400" dirty="0"/>
+            <a:endParaRPr lang="en-US" sz="1500" dirty="0"/>
           </a:p>
         </p:txBody>
       </p:sp>
@@ -13049,7 +12654,7 @@
               <a:buNone/>
             </a:pPr>
             <a:r>
-              <a:rPr lang="en-US" sz="1100" dirty="0">
+              <a:rPr lang="en-US" sz="1300" dirty="0">
                 <a:solidFill>
                   <a:srgbClr val="475569"/>
                 </a:solidFill>
@@ -13059,7 +12664,7 @@
               </a:rPr>
               <a:t>Asks how two or more ideas link together.</a:t>
             </a:r>
-            <a:endParaRPr lang="en-US" sz="1100" dirty="0"/>
+            <a:endParaRPr lang="en-US" sz="1300" dirty="0"/>
           </a:p>
         </p:txBody>
       </p:sp>
@@ -13147,7 +12752,7 @@
               <a:buNone/>
             </a:pPr>
             <a:r>
-              <a:rPr lang="en-US" sz="1400" b="1" dirty="0">
+              <a:rPr lang="en-US" sz="1500" b="1" dirty="0">
                 <a:solidFill>
                   <a:srgbClr val="FFFFFF"/>
                 </a:solidFill>
@@ -13157,7 +12762,7 @@
               </a:rPr>
               <a:t>Extended Abstract</a:t>
             </a:r>
-            <a:endParaRPr lang="en-US" sz="1400" dirty="0"/>
+            <a:endParaRPr lang="en-US" sz="1500" dirty="0"/>
           </a:p>
         </p:txBody>
       </p:sp>
@@ -13333,7 +12938,7 @@
               <a:buNone/>
             </a:pPr>
             <a:r>
-              <a:rPr lang="en-US" sz="1100" dirty="0">
+              <a:rPr lang="en-US" sz="1300" dirty="0">
                 <a:solidFill>
                   <a:srgbClr val="475569"/>
                 </a:solidFill>
@@ -13343,7 +12948,7 @@
               </a:rPr>
               <a:t>Generalizes knowledge to an unfamiliar domain.</a:t>
             </a:r>
-            <a:endParaRPr lang="en-US" sz="1100" dirty="0"/>
+            <a:endParaRPr lang="en-US" sz="1300" dirty="0"/>
           </a:p>
         </p:txBody>
       </p:sp>
@@ -13591,7 +13196,7 @@
               <a:buNone/>
             </a:pPr>
             <a:r>
-              <a:rPr lang="en-US" sz="1600" b="1" dirty="0">
+              <a:rPr lang="en-US" sz="1800" b="1" dirty="0">
                 <a:solidFill>
                   <a:srgbClr val="0A2540"/>
                 </a:solidFill>
@@ -13601,7 +13206,7 @@
               </a:rPr>
               <a:t>Educator workflow</a:t>
             </a:r>
-            <a:endParaRPr lang="en-US" sz="1600" dirty="0"/>
+            <a:endParaRPr lang="en-US" sz="1800" dirty="0"/>
           </a:p>
         </p:txBody>
       </p:sp>
@@ -13634,7 +13239,7 @@
               <a:buChar char="•"/>
             </a:pPr>
             <a:r>
-              <a:rPr lang="en-US" sz="1200" dirty="0">
+              <a:rPr lang="en-US" sz="1500" dirty="0">
                 <a:solidFill>
                   <a:srgbClr val="0F172A"/>
                 </a:solidFill>
@@ -13644,7 +13249,7 @@
               </a:rPr>
               <a:t>Select desired lessons</a:t>
             </a:r>
-            <a:endParaRPr lang="en-US" sz="1200" dirty="0"/>
+            <a:endParaRPr lang="en-US" sz="1500" dirty="0"/>
           </a:p>
           <a:p>
             <a:pPr marL="342900" indent="-342900" algn="l">
@@ -13655,7 +13260,7 @@
               <a:buChar char="•"/>
             </a:pPr>
             <a:r>
-              <a:rPr lang="en-US" sz="1200" dirty="0">
+              <a:rPr lang="en-US" sz="1500" dirty="0">
                 <a:solidFill>
                   <a:srgbClr val="0F172A"/>
                 </a:solidFill>
@@ -13665,7 +13270,7 @@
               </a:rPr>
               <a:t>Choose target SOLO levels</a:t>
             </a:r>
-            <a:endParaRPr lang="en-US" sz="1200" dirty="0"/>
+            <a:endParaRPr lang="en-US" sz="1500" dirty="0"/>
           </a:p>
           <a:p>
             <a:pPr marL="342900" indent="-342900" algn="l">
@@ -13676,7 +13281,7 @@
               <a:buChar char="•"/>
             </a:pPr>
             <a:r>
-              <a:rPr lang="en-US" sz="1200" dirty="0">
+              <a:rPr lang="en-US" sz="1500" dirty="0">
                 <a:solidFill>
                   <a:srgbClr val="0F172A"/>
                 </a:solidFill>
@@ -13686,7 +13291,7 @@
               </a:rPr>
               <a:t>Specify number of questions per level</a:t>
             </a:r>
-            <a:endParaRPr lang="en-US" sz="1200" dirty="0"/>
+            <a:endParaRPr lang="en-US" sz="1500" dirty="0"/>
           </a:p>
           <a:p>
             <a:pPr marL="342900" indent="-342900" algn="l">
@@ -13694,7 +13299,7 @@
               <a:buChar char="•"/>
             </a:pPr>
             <a:r>
-              <a:rPr lang="en-US" sz="1200" dirty="0">
+              <a:rPr lang="en-US" sz="1500" dirty="0">
                 <a:solidFill>
                   <a:srgbClr val="0F172A"/>
                 </a:solidFill>
@@ -13704,7 +13309,7 @@
               </a:rPr>
               <a:t>System assembles the assessment automatically</a:t>
             </a:r>
-            <a:endParaRPr lang="en-US" sz="1200" dirty="0"/>
+            <a:endParaRPr lang="en-US" sz="1500" dirty="0"/>
           </a:p>
         </p:txBody>
       </p:sp>
@@ -13733,7 +13338,7 @@
               <a:buNone/>
             </a:pPr>
             <a:r>
-              <a:rPr lang="en-US" sz="1000" i="1" dirty="0">
+              <a:rPr lang="en-US" sz="1200" i="1" dirty="0">
                 <a:solidFill>
                   <a:srgbClr val="475569"/>
                 </a:solidFill>
@@ -13743,7 +13348,7 @@
               </a:rPr>
               <a:t>Lessons shown in this example were auto-generated from raw teaching materials in Serbian (Operating Systems course).</a:t>
             </a:r>
-            <a:endParaRPr lang="en-US" sz="1000" dirty="0"/>
+            <a:endParaRPr lang="en-US" sz="1200" dirty="0"/>
           </a:p>
         </p:txBody>
       </p:sp>
@@ -13772,7 +13377,7 @@
               <a:buNone/>
             </a:pPr>
             <a:r>
-              <a:rPr lang="en-US" sz="1000" i="1" dirty="0">
+              <a:rPr lang="en-US" sz="1200" i="1" dirty="0">
                 <a:solidFill>
                   <a:srgbClr val="94A3B8"/>
                 </a:solidFill>
@@ -13782,7 +13387,7 @@
               </a:rPr>
               <a:t>Figure 2  Setting parameters for an assessment</a:t>
             </a:r>
-            <a:endParaRPr lang="en-US" sz="1000" dirty="0"/>
+            <a:endParaRPr lang="en-US" sz="1200" dirty="0"/>
           </a:p>
         </p:txBody>
       </p:sp>
@@ -14018,7 +13623,7 @@
               </a:rPr>
               <a:t>08 · USER INTERFACE</a:t>
             </a:r>
-            <a:endParaRPr lang="en-US" sz="1100" dirty="0"/>
+            <a:endParaRPr lang="en-US" sz="1300" dirty="0"/>
           </a:p>
         </p:txBody>
       </p:sp>
@@ -14086,7 +13691,7 @@
               <a:buNone/>
             </a:pPr>
             <a:r>
-              <a:rPr lang="en-US" sz="1300" i="1" dirty="0">
+              <a:rPr lang="en-US" sz="1500" i="1" dirty="0">
                 <a:solidFill>
                   <a:srgbClr val="475569"/>
                 </a:solidFill>
@@ -14096,7 +13701,7 @@
               </a:rPr>
               <a:t>Each item is presented with multiple-choice options, the correct answer, and a detailed explanation, visible to the educator for review.</a:t>
             </a:r>
-            <a:endParaRPr lang="en-US" sz="1300" dirty="0"/>
+            <a:endParaRPr lang="en-US" sz="1500" dirty="0"/>
           </a:p>
         </p:txBody>
       </p:sp>
@@ -14181,7 +13786,7 @@
               <a:buNone/>
             </a:pPr>
             <a:r>
-              <a:rPr lang="en-US" sz="1000" i="1" dirty="0">
+              <a:rPr lang="en-US" sz="1200" i="1" dirty="0">
                 <a:solidFill>
                   <a:srgbClr val="94A3B8"/>
                 </a:solidFill>
@@ -14191,7 +13796,7 @@
               </a:rPr>
               <a:t>Figure 3 An assessment item rendered in the system UI</a:t>
             </a:r>
-            <a:endParaRPr lang="en-US" sz="1000" dirty="0"/>
+            <a:endParaRPr lang="en-US" sz="1200" dirty="0"/>
           </a:p>
         </p:txBody>
       </p:sp>
@@ -14247,7 +13852,7 @@
               <a:buNone/>
             </a:pPr>
             <a:r>
-              <a:rPr lang="en-US" sz="1100" b="1" dirty="0">
+              <a:rPr lang="en-US" sz="1300" b="1" dirty="0">
                 <a:solidFill>
                   <a:srgbClr val="0A2540"/>
                 </a:solidFill>
@@ -14257,7 +13862,7 @@
               </a:rPr>
               <a:t>SOLO level tag</a:t>
             </a:r>
-            <a:endParaRPr lang="en-US" sz="1100" dirty="0"/>
+            <a:endParaRPr lang="en-US" sz="1300" dirty="0"/>
           </a:p>
         </p:txBody>
       </p:sp>
@@ -14286,7 +13891,7 @@
               <a:buNone/>
             </a:pPr>
             <a:r>
-              <a:rPr lang="en-US" sz="1000" dirty="0">
+              <a:rPr lang="en-US" sz="1200" dirty="0">
                 <a:solidFill>
                   <a:srgbClr val="475569"/>
                 </a:solidFill>
@@ -14296,7 +13901,7 @@
               </a:rPr>
               <a:t>shown per question</a:t>
             </a:r>
-            <a:endParaRPr lang="en-US" sz="1000" dirty="0"/>
+            <a:endParaRPr lang="en-US" sz="1200" dirty="0"/>
           </a:p>
         </p:txBody>
       </p:sp>
@@ -14352,7 +13957,7 @@
               <a:buNone/>
             </a:pPr>
             <a:r>
-              <a:rPr lang="en-US" sz="1100" b="1" dirty="0">
+              <a:rPr lang="en-US" sz="1300" b="1" dirty="0">
                 <a:solidFill>
                   <a:srgbClr val="0A2540"/>
                 </a:solidFill>
@@ -14362,7 +13967,7 @@
               </a:rPr>
               <a:t>Source attribution</a:t>
             </a:r>
-            <a:endParaRPr lang="en-US" sz="1100" dirty="0"/>
+            <a:endParaRPr lang="en-US" sz="1300" dirty="0"/>
           </a:p>
         </p:txBody>
       </p:sp>
@@ -14391,7 +13996,7 @@
               <a:buNone/>
             </a:pPr>
             <a:r>
-              <a:rPr lang="en-US" sz="1000" dirty="0"/>
+              <a:rPr lang="en-US" sz="1200" dirty="0"/>
               <a:t>from which lesson</a:t>
             </a:r>
           </a:p>
@@ -14449,7 +14054,7 @@
               <a:buNone/>
             </a:pPr>
             <a:r>
-              <a:rPr lang="en-US" sz="1100" b="1" dirty="0">
+              <a:rPr lang="en-US" sz="1300" b="1" dirty="0">
                 <a:solidFill>
                   <a:srgbClr val="0A2540"/>
                 </a:solidFill>
@@ -14459,7 +14064,7 @@
               </a:rPr>
               <a:t>Reveal answer + rationale</a:t>
             </a:r>
-            <a:endParaRPr lang="en-US" sz="1100" dirty="0"/>
+            <a:endParaRPr lang="en-US" sz="1300" dirty="0"/>
           </a:p>
         </p:txBody>
       </p:sp>
@@ -14488,7 +14093,7 @@
               <a:buNone/>
             </a:pPr>
             <a:r>
-              <a:rPr lang="en-US" sz="1000" dirty="0">
+              <a:rPr lang="en-US" sz="1200" dirty="0">
                 <a:solidFill>
                   <a:srgbClr val="475569"/>
                 </a:solidFill>
@@ -14498,7 +14103,7 @@
               </a:rPr>
               <a:t>for teacher review</a:t>
             </a:r>
-            <a:endParaRPr lang="en-US" sz="1000" dirty="0"/>
+            <a:endParaRPr lang="en-US" sz="1200" dirty="0"/>
           </a:p>
         </p:txBody>
       </p:sp>
